--- a/RFQ Doc/2026.07.15 Security Pack/Maaden ARGP - Security & Assurance.pptx
+++ b/RFQ Doc/2026.07.15 Security Pack/Maaden ARGP - Security & Assurance.pptx
@@ -1819,30 +1819,7 @@
       </p:sp>
       <p:sp>
         <p:nvSpPr>
-          <p:cNvPr id="6" name="Shape 3"/>
-          <p:cNvSpPr/>
-          <p:nvPr/>
-        </p:nvSpPr>
-        <p:spPr>
-          <a:xfrm>
-            <a:off x="658368" y="4069080"/>
-            <a:ext cx="2926080" cy="0"/>
-          </a:xfrm>
-          <a:prstGeom prst="line">
-            <a:avLst/>
-          </a:prstGeom>
-          <a:noFill/>
-          <a:ln w="25400">
-            <a:solidFill>
-              <a:srgbClr val="C9A227"/>
-            </a:solidFill>
-            <a:prstDash val="solid"/>
-          </a:ln>
-        </p:spPr>
-      </p:sp>
-      <p:sp>
-        <p:nvSpPr>
-          <p:cNvPr id="7" name="Text 4"/>
+          <p:cNvPr id="6" name="Text 3"/>
           <p:cNvSpPr/>
           <p:nvPr/>
         </p:nvSpPr>
@@ -1924,7 +1901,7 @@
       </p:sp>
       <p:sp>
         <p:nvSpPr>
-          <p:cNvPr id="8" name="Shape 5"/>
+          <p:cNvPr id="7" name="Shape 4"/>
           <p:cNvSpPr/>
           <p:nvPr/>
         </p:nvSpPr>
@@ -1951,7 +1928,7 @@
       </p:sp>
       <p:pic>
         <p:nvPicPr>
-          <p:cNvPr id="9" name="Image 1" descr="preencoded.png">    </p:cNvPr>
+          <p:cNvPr id="8" name="Image 1" descr="preencoded.png">    </p:cNvPr>
           <p:cNvPicPr>
             <a:picLocks noChangeAspect="1"/>
           </p:cNvPicPr>
@@ -2496,36 +2473,13 @@
       </p:sp>
       <p:sp>
         <p:nvSpPr>
-          <p:cNvPr id="16" name="Shape 13"/>
-          <p:cNvSpPr/>
-          <p:nvPr/>
-        </p:nvSpPr>
-        <p:spPr>
-          <a:xfrm>
-            <a:off x="658368" y="5029200"/>
-            <a:ext cx="2926080" cy="0"/>
-          </a:xfrm>
-          <a:prstGeom prst="line">
-            <a:avLst/>
-          </a:prstGeom>
-          <a:noFill/>
-          <a:ln w="25400">
-            <a:solidFill>
-              <a:srgbClr val="C9A227"/>
-            </a:solidFill>
-            <a:prstDash val="solid"/>
-          </a:ln>
-        </p:spPr>
-      </p:sp>
-      <p:sp>
-        <p:nvSpPr>
-          <p:cNvPr id="17" name="Text 14"/>
-          <p:cNvSpPr/>
-          <p:nvPr/>
-        </p:nvSpPr>
-        <p:spPr>
-          <a:xfrm>
-            <a:off x="658368" y="5230368"/>
+          <p:cNvPr id="16" name="Text 13"/>
+          <p:cNvSpPr/>
+          <p:nvPr/>
+        </p:nvSpPr>
+        <p:spPr>
+          <a:xfrm>
+            <a:off x="658368" y="5138928"/>
             <a:ext cx="7772400" cy="365760"/>
           </a:xfrm>
           <a:prstGeom prst="rect">
@@ -2558,7 +2512,7 @@
       </p:sp>
       <p:sp>
         <p:nvSpPr>
-          <p:cNvPr id="18" name="Text 15"/>
+          <p:cNvPr id="17" name="Text 14"/>
           <p:cNvSpPr/>
           <p:nvPr/>
         </p:nvSpPr>
@@ -2597,7 +2551,7 @@
       </p:sp>
       <p:sp>
         <p:nvSpPr>
-          <p:cNvPr id="19" name="Shape 16"/>
+          <p:cNvPr id="18" name="Shape 15"/>
           <p:cNvSpPr/>
           <p:nvPr/>
         </p:nvSpPr>
@@ -2624,7 +2578,7 @@
       </p:sp>
       <p:pic>
         <p:nvPicPr>
-          <p:cNvPr id="20" name="Image 1" descr="preencoded.png">    </p:cNvPr>
+          <p:cNvPr id="19" name="Image 1" descr="preencoded.png">    </p:cNvPr>
           <p:cNvPicPr>
             <a:picLocks noChangeAspect="1"/>
           </p:cNvPicPr>

--- a/RFQ Doc/2026.07.15 Security Pack/Maaden ARGP - Security & Assurance.pptx
+++ b/RFQ Doc/2026.07.15 Security Pack/Maaden ARGP - Security & Assurance.pptx
@@ -511,7 +511,7 @@
           <a:p>
             <a:r>
               <a:rPr lang="en-US" dirty="0"/>
-              <a:t>Frame: Ma'aden's security team evaluates XD House before commercial terms. This pack is the pre-emptive answer. Everything in it is evidence-backed; where we have no evidence yet, we say so.</a:t>
+              <a:t>Frame: Ma'aden's security team evaluates XD House before commercial terms. This pack is the pre-emptive answer. Everything in it is evidence-backed. Where we have no evidence yet, we say so.</a:t>
             </a:r>
             <a:endParaRPr lang="en-US" dirty="0"/>
           </a:p>
@@ -775,7 +775,7 @@
           <a:p>
             <a:r>
               <a:rPr lang="en-US" dirty="0"/>
-              <a:t>If asked 'when was your last pen test' — the honest answer is none yet on this app, and here is the audit that proves we are not guessing.</a:t>
+              <a:t>If asked when our last pen test was: the honest answer is none yet on this app, and here is the audit that proves we are not guessing.</a:t>
             </a:r>
             <a:endParaRPr lang="en-US" dirty="0"/>
           </a:p>
@@ -863,7 +863,7 @@
           <a:p>
             <a:r>
               <a:rPr lang="en-US" dirty="0"/>
-              <a:t>The value is not 'the demo is secure'. It is: we audit ourselves against a defined standard, find our own problems, and show you the evidence.</a:t>
+              <a:t>The value is not that the demo is secure. It is that we audit ourselves against a defined standard, find our own problems, and show you the evidence.</a:t>
             </a:r>
             <a:endParaRPr lang="en-US" dirty="0"/>
           </a:p>
@@ -1127,7 +1127,7 @@
           <a:p>
             <a:r>
               <a:rPr lang="en-US" dirty="0"/>
-              <a:t>Never merge 'demo today' with 'production committed'. Answering a today-question with a committed-answer is what gets caught.</a:t>
+              <a:t>Never merge demo-today with production-committed. Answering a today-question with a committed-answer is what gets caught.</a:t>
             </a:r>
             <a:endParaRPr lang="en-US" dirty="0"/>
           </a:p>
@@ -1772,7 +1772,7 @@
                 <a:ea typeface="Calibri" pitchFamily="34" charset="-122"/>
                 <a:cs typeface="Calibri" pitchFamily="34" charset="-120"/>
               </a:rPr>
-              <a:t>Ma'aden Ar Rjum Gold Project — CDE Asset Data Backbone</a:t>
+              <a:t>Ma'aden Ar Rjum Gold Project: CDE Asset Data Backbone</a:t>
             </a:r>
             <a:endParaRPr lang="en-US" sz="1900" dirty="0"/>
           </a:p>
@@ -1811,7 +1811,7 @@
                 <a:ea typeface="Calibri" pitchFamily="34" charset="-122"/>
                 <a:cs typeface="Calibri" pitchFamily="34" charset="-120"/>
               </a:rPr>
-              <a:t>Prepared for Ma'aden security &amp; IT review  ·  Module M1 (Master Data Registry)</a:t>
+              <a:t>Prepared for Ma'aden security and IT review. Module M1, Master Data Registry.</a:t>
             </a:r>
             <a:endParaRPr lang="en-US" sz="1300" dirty="0"/>
           </a:p>
@@ -1853,7 +1853,7 @@
                 <a:ea typeface="Calibri" pitchFamily="34" charset="-122"/>
                 <a:cs typeface="Calibri" pitchFamily="34" charset="-120"/>
               </a:rPr>
-              <a:t>SoW ARGP-DIGI-APP-SOW-001 Rev 00 §3.4</a:t>
+              <a:t>SoW ARGP-DIGI-APP-SOW-001 Rev 00, §3.4</a:t>
             </a:r>
             <a:endParaRPr lang="en-US" sz="1200" dirty="0"/>
           </a:p>
@@ -2053,8 +2053,8 @@
         </p:nvSpPr>
         <p:spPr>
           <a:xfrm>
-            <a:off x="658368" y="2752344"/>
-            <a:ext cx="310896" cy="310896"/>
+            <a:off x="685800" y="2825496"/>
+            <a:ext cx="146304" cy="146304"/>
           </a:xfrm>
           <a:prstGeom prst="ellipse">
             <a:avLst/>
@@ -2078,45 +2078,6 @@
         </p:nvSpPr>
         <p:spPr>
           <a:xfrm>
-            <a:off x="658368" y="2752344"/>
-            <a:ext cx="310896" cy="310896"/>
-          </a:xfrm>
-          <a:prstGeom prst="rect">
-            <a:avLst/>
-          </a:prstGeom>
-          <a:noFill/>
-          <a:ln/>
-        </p:spPr>
-        <p:txBody>
-          <a:bodyPr wrap="square" lIns="0" tIns="0" rIns="0" bIns="0" rtlCol="0" anchor="ctr"/>
-          <a:lstStyle/>
-          <a:p>
-            <a:pPr algn="ctr" indent="0" marL="0">
-              <a:buNone/>
-            </a:pPr>
-            <a:r>
-              <a:rPr lang="en-US" sz="1200" b="1" dirty="0">
-                <a:solidFill>
-                  <a:srgbClr val="23242A"/>
-                </a:solidFill>
-                <a:latin typeface="Calibri" pitchFamily="34" charset="0"/>
-                <a:ea typeface="Calibri" pitchFamily="34" charset="-122"/>
-                <a:cs typeface="Calibri" pitchFamily="34" charset="-120"/>
-              </a:rPr>
-              <a:t>✓</a:t>
-            </a:r>
-            <a:endParaRPr lang="en-US" sz="1200" dirty="0"/>
-          </a:p>
-        </p:txBody>
-      </p:sp>
-      <p:sp>
-        <p:nvSpPr>
-          <p:cNvPr id="6" name="Text 3"/>
-          <p:cNvSpPr/>
-          <p:nvPr/>
-        </p:nvSpPr>
-        <p:spPr>
-          <a:xfrm>
             <a:off x="1115568" y="2697480"/>
             <a:ext cx="3017520" cy="384048"/>
           </a:xfrm>
@@ -2150,7 +2111,7 @@
       </p:sp>
       <p:sp>
         <p:nvSpPr>
-          <p:cNvPr id="7" name="Text 4"/>
+          <p:cNvPr id="6" name="Text 3"/>
           <p:cNvSpPr/>
           <p:nvPr/>
         </p:nvSpPr>
@@ -2181,7 +2142,7 @@
                 <a:ea typeface="Calibri" pitchFamily="34" charset="-122"/>
                 <a:cs typeface="Calibri" pitchFamily="34" charset="-120"/>
               </a:rPr>
-              <a:t>Against a defined 13-layer standard — and we show you the failures, not a marketing summary.</a:t>
+              <a:t>Against a defined 13-layer standard. We show you the failures, not a marketing summary.</a:t>
             </a:r>
             <a:endParaRPr lang="en-US" sz="1250" dirty="0"/>
           </a:p>
@@ -2189,14 +2150,14 @@
       </p:sp>
       <p:sp>
         <p:nvSpPr>
-          <p:cNvPr id="8" name="Shape 5"/>
-          <p:cNvSpPr/>
-          <p:nvPr/>
-        </p:nvSpPr>
-        <p:spPr>
-          <a:xfrm>
-            <a:off x="658368" y="3465576"/>
-            <a:ext cx="310896" cy="310896"/>
+          <p:cNvPr id="7" name="Shape 4"/>
+          <p:cNvSpPr/>
+          <p:nvPr/>
+        </p:nvSpPr>
+        <p:spPr>
+          <a:xfrm>
+            <a:off x="685800" y="3538728"/>
+            <a:ext cx="146304" cy="146304"/>
           </a:xfrm>
           <a:prstGeom prst="ellipse">
             <a:avLst/>
@@ -2214,46 +2175,7 @@
       </p:sp>
       <p:sp>
         <p:nvSpPr>
-          <p:cNvPr id="9" name="Text 6"/>
-          <p:cNvSpPr/>
-          <p:nvPr/>
-        </p:nvSpPr>
-        <p:spPr>
-          <a:xfrm>
-            <a:off x="658368" y="3465576"/>
-            <a:ext cx="310896" cy="310896"/>
-          </a:xfrm>
-          <a:prstGeom prst="rect">
-            <a:avLst/>
-          </a:prstGeom>
-          <a:noFill/>
-          <a:ln/>
-        </p:spPr>
-        <p:txBody>
-          <a:bodyPr wrap="square" lIns="0" tIns="0" rIns="0" bIns="0" rtlCol="0" anchor="ctr"/>
-          <a:lstStyle/>
-          <a:p>
-            <a:pPr algn="ctr" indent="0" marL="0">
-              <a:buNone/>
-            </a:pPr>
-            <a:r>
-              <a:rPr lang="en-US" sz="1200" b="1" dirty="0">
-                <a:solidFill>
-                  <a:srgbClr val="23242A"/>
-                </a:solidFill>
-                <a:latin typeface="Calibri" pitchFamily="34" charset="0"/>
-                <a:ea typeface="Calibri" pitchFamily="34" charset="-122"/>
-                <a:cs typeface="Calibri" pitchFamily="34" charset="-120"/>
-              </a:rPr>
-              <a:t>✓</a:t>
-            </a:r>
-            <a:endParaRPr lang="en-US" sz="1200" dirty="0"/>
-          </a:p>
-        </p:txBody>
-      </p:sp>
-      <p:sp>
-        <p:nvSpPr>
-          <p:cNvPr id="10" name="Text 7"/>
+          <p:cNvPr id="8" name="Text 5"/>
           <p:cNvSpPr/>
           <p:nvPr/>
         </p:nvSpPr>
@@ -2292,7 +2214,7 @@
       </p:sp>
       <p:sp>
         <p:nvSpPr>
-          <p:cNvPr id="11" name="Text 8"/>
+          <p:cNvPr id="9" name="Text 6"/>
           <p:cNvSpPr/>
           <p:nvPr/>
         </p:nvSpPr>
@@ -2331,14 +2253,14 @@
       </p:sp>
       <p:sp>
         <p:nvSpPr>
-          <p:cNvPr id="12" name="Shape 9"/>
-          <p:cNvSpPr/>
-          <p:nvPr/>
-        </p:nvSpPr>
-        <p:spPr>
-          <a:xfrm>
-            <a:off x="658368" y="4178808"/>
-            <a:ext cx="310896" cy="310896"/>
+          <p:cNvPr id="10" name="Shape 7"/>
+          <p:cNvSpPr/>
+          <p:nvPr/>
+        </p:nvSpPr>
+        <p:spPr>
+          <a:xfrm>
+            <a:off x="685800" y="4251960"/>
+            <a:ext cx="146304" cy="146304"/>
           </a:xfrm>
           <a:prstGeom prst="ellipse">
             <a:avLst/>
@@ -2356,46 +2278,7 @@
       </p:sp>
       <p:sp>
         <p:nvSpPr>
-          <p:cNvPr id="13" name="Text 10"/>
-          <p:cNvSpPr/>
-          <p:nvPr/>
-        </p:nvSpPr>
-        <p:spPr>
-          <a:xfrm>
-            <a:off x="658368" y="4178808"/>
-            <a:ext cx="310896" cy="310896"/>
-          </a:xfrm>
-          <a:prstGeom prst="rect">
-            <a:avLst/>
-          </a:prstGeom>
-          <a:noFill/>
-          <a:ln/>
-        </p:spPr>
-        <p:txBody>
-          <a:bodyPr wrap="square" lIns="0" tIns="0" rIns="0" bIns="0" rtlCol="0" anchor="ctr"/>
-          <a:lstStyle/>
-          <a:p>
-            <a:pPr algn="ctr" indent="0" marL="0">
-              <a:buNone/>
-            </a:pPr>
-            <a:r>
-              <a:rPr lang="en-US" sz="1200" b="1" dirty="0">
-                <a:solidFill>
-                  <a:srgbClr val="23242A"/>
-                </a:solidFill>
-                <a:latin typeface="Calibri" pitchFamily="34" charset="0"/>
-                <a:ea typeface="Calibri" pitchFamily="34" charset="-122"/>
-                <a:cs typeface="Calibri" pitchFamily="34" charset="-120"/>
-              </a:rPr>
-              <a:t>✓</a:t>
-            </a:r>
-            <a:endParaRPr lang="en-US" sz="1200" dirty="0"/>
-          </a:p>
-        </p:txBody>
-      </p:sp>
-      <p:sp>
-        <p:nvSpPr>
-          <p:cNvPr id="14" name="Text 11"/>
+          <p:cNvPr id="11" name="Text 8"/>
           <p:cNvSpPr/>
           <p:nvPr/>
         </p:nvSpPr>
@@ -2434,7 +2317,7 @@
       </p:sp>
       <p:sp>
         <p:nvSpPr>
-          <p:cNvPr id="15" name="Text 12"/>
+          <p:cNvPr id="12" name="Text 9"/>
           <p:cNvSpPr/>
           <p:nvPr/>
         </p:nvSpPr>
@@ -2473,7 +2356,7 @@
       </p:sp>
       <p:sp>
         <p:nvSpPr>
-          <p:cNvPr id="16" name="Text 13"/>
+          <p:cNvPr id="13" name="Text 10"/>
           <p:cNvSpPr/>
           <p:nvPr/>
         </p:nvSpPr>
@@ -2512,7 +2395,7 @@
       </p:sp>
       <p:sp>
         <p:nvSpPr>
-          <p:cNvPr id="17" name="Text 14"/>
+          <p:cNvPr id="14" name="Text 11"/>
           <p:cNvSpPr/>
           <p:nvPr/>
         </p:nvSpPr>
@@ -2543,7 +2426,7 @@
                 <a:ea typeface="Calibri" pitchFamily="34" charset="-122"/>
                 <a:cs typeface="Calibri" pitchFamily="34" charset="-120"/>
               </a:rPr>
-              <a:t>XD House  ·  Ma'aden Ar Rjum Gold Project  ·  Security &amp; Assurance  ·  15 July 2026</a:t>
+              <a:t>XD House   |   Ma'aden Ar Rjum Gold Project   |   15 July 2026</a:t>
             </a:r>
             <a:endParaRPr lang="en-US" sz="1100" dirty="0"/>
           </a:p>
@@ -2551,7 +2434,7 @@
       </p:sp>
       <p:sp>
         <p:nvSpPr>
-          <p:cNvPr id="18" name="Shape 15"/>
+          <p:cNvPr id="15" name="Shape 12"/>
           <p:cNvSpPr/>
           <p:nvPr/>
         </p:nvSpPr>
@@ -2578,7 +2461,7 @@
       </p:sp>
       <p:pic>
         <p:nvPicPr>
-          <p:cNvPr id="19" name="Image 1" descr="preencoded.png">    </p:cNvPr>
+          <p:cNvPr id="16" name="Image 1" descr="preencoded.png">    </p:cNvPr>
           <p:cNvPicPr>
             <a:picLocks noChangeAspect="1"/>
           </p:cNvPicPr>
@@ -2965,7 +2848,7 @@
                 <a:ea typeface="Calibri" pitchFamily="34" charset="-122"/>
                 <a:cs typeface="Calibri" pitchFamily="34" charset="-120"/>
               </a:rPr>
-              <a:t>Do you have an incident response plan — can we see it?</a:t>
+              <a:t>Do you have an incident response plan? Can we see it?</a:t>
             </a:r>
             <a:endParaRPr lang="en-US" sz="1250" dirty="0"/>
           </a:p>
@@ -3168,7 +3051,7 @@
                 <a:ea typeface="Calibri" pitchFamily="34" charset="-122"/>
                 <a:cs typeface="Calibri" pitchFamily="34" charset="-120"/>
               </a:rPr>
-              <a:t>For the layer every downstream system trusts — your asset data backbone — it is the precondition.</a:t>
+              <a:t>Your asset data backbone is the layer every downstream system trusts, so security is its precondition.</a:t>
             </a:r>
             <a:endParaRPr lang="en-US" sz="1350" dirty="0"/>
           </a:p>
@@ -3197,7 +3080,7 @@
                 <a:ea typeface="Calibri" pitchFamily="34" charset="-122"/>
                 <a:cs typeface="Calibri" pitchFamily="34" charset="-120"/>
               </a:rPr>
-              <a:t>So we audit our own stack, fix what we find, commission an independent test, then re-audit. And we show you the evidence from each step — including the failures.</a:t>
+              <a:t>So we audit our own stack, fix what we find, commission an independent test, then re-audit. We show you the evidence from every step, including the failures.</a:t>
             </a:r>
             <a:endParaRPr lang="en-US" sz="1350" dirty="0"/>
           </a:p>
@@ -3275,7 +3158,7 @@
                 <a:ea typeface="Calibri" pitchFamily="34" charset="-122"/>
                 <a:cs typeface="Calibri" pitchFamily="34" charset="-120"/>
               </a:rPr>
-              <a:t>XD House · Ma'aden ARGP Security &amp; Assurance · 15 July 2026</a:t>
+              <a:t>XD House   |   Ma'aden ARGP Security &amp; Assurance   |   15 July 2026</a:t>
             </a:r>
             <a:endParaRPr lang="en-US" sz="900" dirty="0"/>
           </a:p>
@@ -3346,7 +3229,7 @@
                 <a:ea typeface="Cambria" pitchFamily="34" charset="-122"/>
                 <a:cs typeface="Cambria" pitchFamily="34" charset="-120"/>
               </a:rPr>
-              <a:t>Audit → Remediate → Test → Re-audit</a:t>
+              <a:t>Audit. Remediate. Test. Re-audit.</a:t>
             </a:r>
             <a:endParaRPr lang="en-US" sz="3000" dirty="0"/>
           </a:p>
@@ -3675,46 +3558,7 @@
       </p:sp>
       <p:sp>
         <p:nvSpPr>
-          <p:cNvPr id="12" name="Text 9"/>
-          <p:cNvSpPr/>
-          <p:nvPr/>
-        </p:nvSpPr>
-        <p:spPr>
-          <a:xfrm>
-            <a:off x="3200400" y="1828800"/>
-            <a:ext cx="320040" cy="566928"/>
-          </a:xfrm>
-          <a:prstGeom prst="rect">
-            <a:avLst/>
-          </a:prstGeom>
-          <a:noFill/>
-          <a:ln/>
-        </p:spPr>
-        <p:txBody>
-          <a:bodyPr wrap="square" lIns="0" tIns="0" rIns="0" bIns="0" rtlCol="0" anchor="ctr"/>
-          <a:lstStyle/>
-          <a:p>
-            <a:pPr algn="ctr" indent="0" marL="0">
-              <a:buNone/>
-            </a:pPr>
-            <a:r>
-              <a:rPr lang="en-US" sz="1800" b="1" dirty="0">
-                <a:solidFill>
-                  <a:srgbClr val="C9A227"/>
-                </a:solidFill>
-                <a:latin typeface="Calibri" pitchFamily="34" charset="0"/>
-                <a:ea typeface="Calibri" pitchFamily="34" charset="-122"/>
-                <a:cs typeface="Calibri" pitchFamily="34" charset="-120"/>
-              </a:rPr>
-              <a:t>▸</a:t>
-            </a:r>
-            <a:endParaRPr lang="en-US" sz="1800" dirty="0"/>
-          </a:p>
-        </p:txBody>
-      </p:sp>
-      <p:sp>
-        <p:nvSpPr>
-          <p:cNvPr id="13" name="Shape 10"/>
+          <p:cNvPr id="12" name="Shape 9"/>
           <p:cNvSpPr/>
           <p:nvPr/>
         </p:nvSpPr>
@@ -3741,7 +3585,7 @@
       </p:sp>
       <p:sp>
         <p:nvSpPr>
-          <p:cNvPr id="14" name="Shape 11"/>
+          <p:cNvPr id="13" name="Shape 10"/>
           <p:cNvSpPr/>
           <p:nvPr/>
         </p:nvSpPr>
@@ -3766,7 +3610,7 @@
       </p:sp>
       <p:sp>
         <p:nvSpPr>
-          <p:cNvPr id="15" name="Text 12"/>
+          <p:cNvPr id="14" name="Text 11"/>
           <p:cNvSpPr/>
           <p:nvPr/>
         </p:nvSpPr>
@@ -3805,7 +3649,7 @@
       </p:sp>
       <p:sp>
         <p:nvSpPr>
-          <p:cNvPr id="16" name="Text 13"/>
+          <p:cNvPr id="15" name="Text 12"/>
           <p:cNvSpPr/>
           <p:nvPr/>
         </p:nvSpPr>
@@ -3844,7 +3688,7 @@
       </p:sp>
       <p:sp>
         <p:nvSpPr>
-          <p:cNvPr id="17" name="Text 14"/>
+          <p:cNvPr id="16" name="Text 13"/>
           <p:cNvSpPr/>
           <p:nvPr/>
         </p:nvSpPr>
@@ -3906,7 +3750,7 @@
       </p:sp>
       <p:sp>
         <p:nvSpPr>
-          <p:cNvPr id="18" name="Shape 15"/>
+          <p:cNvPr id="17" name="Shape 14"/>
           <p:cNvSpPr/>
           <p:nvPr/>
         </p:nvSpPr>
@@ -3933,7 +3777,7 @@
       </p:sp>
       <p:sp>
         <p:nvSpPr>
-          <p:cNvPr id="19" name="Text 16"/>
+          <p:cNvPr id="18" name="Text 15"/>
           <p:cNvSpPr/>
           <p:nvPr/>
         </p:nvSpPr>
@@ -3972,46 +3816,7 @@
       </p:sp>
       <p:sp>
         <p:nvSpPr>
-          <p:cNvPr id="20" name="Text 17"/>
-          <p:cNvSpPr/>
-          <p:nvPr/>
-        </p:nvSpPr>
-        <p:spPr>
-          <a:xfrm>
-            <a:off x="6035040" y="1828800"/>
-            <a:ext cx="320040" cy="566928"/>
-          </a:xfrm>
-          <a:prstGeom prst="rect">
-            <a:avLst/>
-          </a:prstGeom>
-          <a:noFill/>
-          <a:ln/>
-        </p:spPr>
-        <p:txBody>
-          <a:bodyPr wrap="square" lIns="0" tIns="0" rIns="0" bIns="0" rtlCol="0" anchor="ctr"/>
-          <a:lstStyle/>
-          <a:p>
-            <a:pPr algn="ctr" indent="0" marL="0">
-              <a:buNone/>
-            </a:pPr>
-            <a:r>
-              <a:rPr lang="en-US" sz="1800" b="1" dirty="0">
-                <a:solidFill>
-                  <a:srgbClr val="C9A227"/>
-                </a:solidFill>
-                <a:latin typeface="Calibri" pitchFamily="34" charset="0"/>
-                <a:ea typeface="Calibri" pitchFamily="34" charset="-122"/>
-                <a:cs typeface="Calibri" pitchFamily="34" charset="-120"/>
-              </a:rPr>
-              <a:t>▸</a:t>
-            </a:r>
-            <a:endParaRPr lang="en-US" sz="1800" dirty="0"/>
-          </a:p>
-        </p:txBody>
-      </p:sp>
-      <p:sp>
-        <p:nvSpPr>
-          <p:cNvPr id="21" name="Shape 18"/>
+          <p:cNvPr id="19" name="Shape 16"/>
           <p:cNvSpPr/>
           <p:nvPr/>
         </p:nvSpPr>
@@ -4038,7 +3843,7 @@
       </p:sp>
       <p:sp>
         <p:nvSpPr>
-          <p:cNvPr id="22" name="Shape 19"/>
+          <p:cNvPr id="20" name="Shape 17"/>
           <p:cNvSpPr/>
           <p:nvPr/>
         </p:nvSpPr>
@@ -4063,7 +3868,7 @@
       </p:sp>
       <p:sp>
         <p:nvSpPr>
-          <p:cNvPr id="23" name="Text 20"/>
+          <p:cNvPr id="21" name="Text 18"/>
           <p:cNvSpPr/>
           <p:nvPr/>
         </p:nvSpPr>
@@ -4102,7 +3907,7 @@
       </p:sp>
       <p:sp>
         <p:nvSpPr>
-          <p:cNvPr id="24" name="Text 21"/>
+          <p:cNvPr id="22" name="Text 19"/>
           <p:cNvSpPr/>
           <p:nvPr/>
         </p:nvSpPr>
@@ -4141,7 +3946,7 @@
       </p:sp>
       <p:sp>
         <p:nvSpPr>
-          <p:cNvPr id="25" name="Text 22"/>
+          <p:cNvPr id="23" name="Text 20"/>
           <p:cNvSpPr/>
           <p:nvPr/>
         </p:nvSpPr>
@@ -4203,7 +4008,7 @@
       </p:sp>
       <p:sp>
         <p:nvSpPr>
-          <p:cNvPr id="26" name="Shape 23"/>
+          <p:cNvPr id="24" name="Shape 21"/>
           <p:cNvSpPr/>
           <p:nvPr/>
         </p:nvSpPr>
@@ -4230,7 +4035,7 @@
       </p:sp>
       <p:sp>
         <p:nvSpPr>
-          <p:cNvPr id="27" name="Text 24"/>
+          <p:cNvPr id="25" name="Text 22"/>
           <p:cNvSpPr/>
           <p:nvPr/>
         </p:nvSpPr>
@@ -4269,46 +4074,7 @@
       </p:sp>
       <p:sp>
         <p:nvSpPr>
-          <p:cNvPr id="28" name="Text 25"/>
-          <p:cNvSpPr/>
-          <p:nvPr/>
-        </p:nvSpPr>
-        <p:spPr>
-          <a:xfrm>
-            <a:off x="8869680" y="1828800"/>
-            <a:ext cx="320040" cy="566928"/>
-          </a:xfrm>
-          <a:prstGeom prst="rect">
-            <a:avLst/>
-          </a:prstGeom>
-          <a:noFill/>
-          <a:ln/>
-        </p:spPr>
-        <p:txBody>
-          <a:bodyPr wrap="square" lIns="0" tIns="0" rIns="0" bIns="0" rtlCol="0" anchor="ctr"/>
-          <a:lstStyle/>
-          <a:p>
-            <a:pPr algn="ctr" indent="0" marL="0">
-              <a:buNone/>
-            </a:pPr>
-            <a:r>
-              <a:rPr lang="en-US" sz="1800" b="1" dirty="0">
-                <a:solidFill>
-                  <a:srgbClr val="C9A227"/>
-                </a:solidFill>
-                <a:latin typeface="Calibri" pitchFamily="34" charset="0"/>
-                <a:ea typeface="Calibri" pitchFamily="34" charset="-122"/>
-                <a:cs typeface="Calibri" pitchFamily="34" charset="-120"/>
-              </a:rPr>
-              <a:t>▸</a:t>
-            </a:r>
-            <a:endParaRPr lang="en-US" sz="1800" dirty="0"/>
-          </a:p>
-        </p:txBody>
-      </p:sp>
-      <p:sp>
-        <p:nvSpPr>
-          <p:cNvPr id="29" name="Shape 26"/>
+          <p:cNvPr id="26" name="Shape 23"/>
           <p:cNvSpPr/>
           <p:nvPr/>
         </p:nvSpPr>
@@ -4335,7 +4101,7 @@
       </p:sp>
       <p:sp>
         <p:nvSpPr>
-          <p:cNvPr id="30" name="Shape 27"/>
+          <p:cNvPr id="27" name="Shape 24"/>
           <p:cNvSpPr/>
           <p:nvPr/>
         </p:nvSpPr>
@@ -4360,7 +4126,7 @@
       </p:sp>
       <p:sp>
         <p:nvSpPr>
-          <p:cNvPr id="31" name="Text 28"/>
+          <p:cNvPr id="28" name="Text 25"/>
           <p:cNvSpPr/>
           <p:nvPr/>
         </p:nvSpPr>
@@ -4399,7 +4165,7 @@
       </p:sp>
       <p:sp>
         <p:nvSpPr>
-          <p:cNvPr id="32" name="Text 29"/>
+          <p:cNvPr id="29" name="Text 26"/>
           <p:cNvSpPr/>
           <p:nvPr/>
         </p:nvSpPr>
@@ -4438,7 +4204,7 @@
       </p:sp>
       <p:sp>
         <p:nvSpPr>
-          <p:cNvPr id="33" name="Text 30"/>
+          <p:cNvPr id="30" name="Text 27"/>
           <p:cNvSpPr/>
           <p:nvPr/>
         </p:nvSpPr>
@@ -4500,7 +4266,7 @@
       </p:sp>
       <p:sp>
         <p:nvSpPr>
-          <p:cNvPr id="34" name="Shape 31"/>
+          <p:cNvPr id="31" name="Shape 28"/>
           <p:cNvSpPr/>
           <p:nvPr/>
         </p:nvSpPr>
@@ -4527,7 +4293,7 @@
       </p:sp>
       <p:sp>
         <p:nvSpPr>
-          <p:cNvPr id="35" name="Text 32"/>
+          <p:cNvPr id="32" name="Text 29"/>
           <p:cNvSpPr/>
           <p:nvPr/>
         </p:nvSpPr>
@@ -4566,7 +4332,7 @@
       </p:sp>
       <p:sp>
         <p:nvSpPr>
-          <p:cNvPr id="36" name="Shape 33"/>
+          <p:cNvPr id="33" name="Shape 30"/>
           <p:cNvSpPr/>
           <p:nvPr/>
         </p:nvSpPr>
@@ -4593,7 +4359,7 @@
       </p:sp>
       <p:sp>
         <p:nvSpPr>
-          <p:cNvPr id="37" name="Text 34"/>
+          <p:cNvPr id="34" name="Text 31"/>
           <p:cNvSpPr/>
           <p:nvPr/>
         </p:nvSpPr>
@@ -4627,7 +4393,7 @@
                 <a:ea typeface="Calibri" pitchFamily="34" charset="-122"/>
                 <a:cs typeface="Calibri" pitchFamily="34" charset="-120"/>
               </a:rPr>
-              <a:t>Where we are today:  </a:t>
+              <a:t>Where we are today.  </a:t>
             </a:r>
             <a:pPr indent="0" marL="0">
               <a:lnSpc>
@@ -4644,7 +4410,7 @@
                 <a:ea typeface="Calibri" pitchFamily="34" charset="-122"/>
                 <a:cs typeface="Calibri" pitchFamily="34" charset="-120"/>
               </a:rPr>
-              <a:t>Audit #1 is complete and available to you now. No penetration test has been run on this application yet — it is scoped and will be commissioned after remediation. We will not present a test result until an external firm has actually performed one.</a:t>
+              <a:t>Audit #1 is complete and available to you now. No penetration test has been run on this application yet. It is scoped and will be commissioned after remediation. We will not present a test result until an external firm has actually performed one.</a:t>
             </a:r>
             <a:endParaRPr lang="en-US" sz="1300" dirty="0"/>
           </a:p>
@@ -4652,7 +4418,7 @@
       </p:sp>
       <p:sp>
         <p:nvSpPr>
-          <p:cNvPr id="38" name="Text 35"/>
+          <p:cNvPr id="35" name="Text 32"/>
           <p:cNvSpPr/>
           <p:nvPr/>
         </p:nvSpPr>
@@ -4683,7 +4449,7 @@
                 <a:ea typeface="Calibri" pitchFamily="34" charset="-122"/>
                 <a:cs typeface="Calibri" pitchFamily="34" charset="-120"/>
               </a:rPr>
-              <a:t>XD House · Ma'aden ARGP Security &amp; Assurance · 15 July 2026</a:t>
+              <a:t>XD House   |   Ma'aden ARGP Security &amp; Assurance   |   15 July 2026</a:t>
             </a:r>
             <a:endParaRPr lang="en-US" sz="900" dirty="0"/>
           </a:p>
@@ -4793,7 +4559,7 @@
                 <a:ea typeface="Calibri" pitchFamily="34" charset="-122"/>
                 <a:cs typeface="Calibri" pitchFamily="34" charset="-120"/>
               </a:rPr>
-              <a:t>Audit #1 · commit 0d25f7f · 15 July 2026 · source review + dependency scan + live reproduction</a:t>
+              <a:t>Audit #1, commit 0d25f7f, 15 July 2026. Source review, dependency scan, live reproduction.</a:t>
             </a:r>
             <a:endParaRPr lang="en-US" sz="1300" dirty="0"/>
           </a:p>
@@ -5117,7 +4883,7 @@
                 <a:ea typeface="Calibri" pitchFamily="34" charset="-122"/>
                 <a:cs typeface="Calibri" pitchFamily="34" charset="-120"/>
               </a:rPr>
-              <a:t>Azure AD + ADFS SSO, SAML 2.0, MFA</a:t>
+              <a:t>Azure AD and ADFS SSO, SAML 2.0, MFA</a:t>
             </a:r>
             <a:endParaRPr lang="en-US" sz="1100" dirty="0"/>
           </a:p>
@@ -5849,7 +5615,7 @@
                 <a:ea typeface="Calibri" pitchFamily="34" charset="-122"/>
                 <a:cs typeface="Calibri" pitchFamily="34" charset="-120"/>
               </a:rPr>
-              <a:t>Maintain; schema validation at API</a:t>
+              <a:t>Maintain, add schema validation at API</a:t>
             </a:r>
             <a:endParaRPr lang="en-US" sz="1100" dirty="0"/>
           </a:p>
@@ -6032,7 +5798,7 @@
                 <a:ea typeface="Calibri" pitchFamily="34" charset="-122"/>
                 <a:cs typeface="Calibri" pitchFamily="34" charset="-120"/>
               </a:rPr>
-              <a:t>Azure Key Vault / managed identity</a:t>
+              <a:t>Azure Key Vault, managed identity</a:t>
             </a:r>
             <a:endParaRPr lang="en-US" sz="1100" dirty="0"/>
           </a:p>
@@ -6764,7 +6530,7 @@
                 <a:ea typeface="Calibri" pitchFamily="34" charset="-122"/>
                 <a:cs typeface="Calibri" pitchFamily="34" charset="-120"/>
               </a:rPr>
-              <a:t>GitHub Enterprise + Azure DevOps</a:t>
+              <a:t>GitHub Enterprise, Azure DevOps</a:t>
             </a:r>
             <a:endParaRPr lang="en-US" sz="1100" dirty="0"/>
           </a:p>
@@ -6947,7 +6713,7 @@
                 <a:ea typeface="Calibri" pitchFamily="34" charset="-122"/>
                 <a:cs typeface="Calibri" pitchFamily="34" charset="-120"/>
               </a:rPr>
-              <a:t>App Insights + Azure Sentinel SIEM</a:t>
+              <a:t>App Insights, Azure Sentinel SIEM</a:t>
             </a:r>
             <a:endParaRPr lang="en-US" sz="1100" dirty="0"/>
           </a:p>
@@ -7721,7 +7487,7 @@
                 <a:ea typeface="Calibri" pitchFamily="34" charset="-122"/>
                 <a:cs typeface="Calibri" pitchFamily="34" charset="-120"/>
               </a:rPr>
-              <a:t>This scores the pre-award demo on localhost — not production. It holds no Ma'aden data and is not internet-facing.</a:t>
+              <a:t>This scores the pre-award demo on localhost, not production. It holds no Ma'aden data and is not internet-facing.</a:t>
             </a:r>
             <a:endParaRPr lang="en-US" sz="950" dirty="0"/>
           </a:p>
@@ -7789,7 +7555,7 @@
                 <a:ea typeface="Calibri" pitchFamily="34" charset="-122"/>
                 <a:cs typeface="Calibri" pitchFamily="34" charset="-120"/>
               </a:rPr>
-              <a:t>Full report: 02 — Production Readiness Audit — 13 Layers · XD House · 15 July 2026</a:t>
+              <a:t>XD House   |   Ma'aden ARGP Security &amp; Assurance   |   15 July 2026</a:t>
             </a:r>
             <a:endParaRPr lang="en-US" sz="900" dirty="0"/>
           </a:p>
@@ -7899,7 +7665,7 @@
                 <a:ea typeface="Calibri" pitchFamily="34" charset="-122"/>
                 <a:cs typeface="Calibri" pitchFamily="34" charset="-120"/>
               </a:rPr>
-              <a:t>Reproduced against a running instance — not a checklist exercise</a:t>
+              <a:t>Reproduced against a running instance, not a checklist exercise</a:t>
             </a:r>
             <a:endParaRPr lang="en-US" sz="1300" dirty="0"/>
           </a:p>
@@ -8163,7 +7929,7 @@
                 <a:ea typeface="Calibri" pitchFamily="34" charset="-122"/>
                 <a:cs typeface="Calibri" pitchFamily="34" charset="-120"/>
               </a:rPr>
-              <a:t>~1 h — delete the fallback</a:t>
+              <a:t>~1 h to delete the fallback</a:t>
             </a:r>
             <a:endParaRPr lang="en-US" sz="1100" dirty="0"/>
           </a:p>
@@ -8337,7 +8103,7 @@
                 <a:ea typeface="Calibri" pitchFamily="34" charset="-122"/>
                 <a:cs typeface="Calibri" pitchFamily="34" charset="-120"/>
               </a:rPr>
-              <a:t>The demo role switcher issues a session for any user, no password.</a:t>
+              <a:t>The demo role switcher issues a session for any user, with no password.</a:t>
             </a:r>
             <a:endParaRPr lang="en-US" sz="1150" dirty="0"/>
           </a:p>
@@ -8403,7 +8169,7 @@
                 <a:ea typeface="Calibri" pitchFamily="34" charset="-122"/>
                 <a:cs typeface="Calibri" pitchFamily="34" charset="-120"/>
               </a:rPr>
-              <a:t>3–5 d — wire ADFS/Azure AD SAML</a:t>
+              <a:t>3 to 5 d to wire ADFS SAML</a:t>
             </a:r>
             <a:endParaRPr lang="en-US" sz="1100" dirty="0"/>
           </a:p>
@@ -8577,7 +8343,7 @@
                 <a:ea typeface="Calibri" pitchFamily="34" charset="-122"/>
                 <a:cs typeface="Calibri" pitchFamily="34" charset="-120"/>
               </a:rPr>
-              <a:t>next@14.2.5 — DoS, XSS, cache poisoning, SSRF. Found by dependency scan.</a:t>
+              <a:t>next@14.2.5 carries DoS, XSS, cache poisoning and SSRF advisories. Found by dependency scan.</a:t>
             </a:r>
             <a:endParaRPr lang="en-US" sz="1150" dirty="0"/>
           </a:p>
@@ -8643,7 +8409,7 @@
                 <a:ea typeface="Calibri" pitchFamily="34" charset="-122"/>
                 <a:cs typeface="Calibri" pitchFamily="34" charset="-120"/>
               </a:rPr>
-              <a:t>0.5–2 d — upgrade + re-verify</a:t>
+              <a:t>0.5 to 2 d to upgrade</a:t>
             </a:r>
             <a:endParaRPr lang="en-US" sz="1100" dirty="0"/>
           </a:p>
@@ -8775,7 +8541,7 @@
                 <a:ea typeface="Calibri" pitchFamily="34" charset="-122"/>
                 <a:cs typeface="Calibri" pitchFamily="34" charset="-120"/>
               </a:rPr>
-              <a:t>Default signing secret · cookie not Secure · no TLS</a:t>
+              <a:t>Default signing secret, cookie not Secure, no TLS</a:t>
             </a:r>
             <a:endParaRPr lang="en-US" sz="1350" dirty="0"/>
           </a:p>
@@ -8922,7 +8688,7 @@
                 <a:ea typeface="Calibri" pitchFamily="34" charset="-122"/>
                 <a:cs typeface="Calibri" pitchFamily="34" charset="-120"/>
               </a:rPr>
-              <a:t>Every Critical finding is a demo-scope removal — but they become live vulnerabilities the moment the demo leaves localhost.</a:t>
+              <a:t>Every Critical finding is a demo-scope removal, but they become live vulnerabilities the moment the demo leaves localhost.</a:t>
             </a:r>
             <a:endParaRPr lang="en-US" sz="1200" dirty="0"/>
           </a:p>
@@ -8961,7 +8727,7 @@
                 <a:ea typeface="Calibri" pitchFamily="34" charset="-122"/>
                 <a:cs typeface="Calibri" pitchFamily="34" charset="-120"/>
               </a:rPr>
-              <a:t>XD House · Ma'aden ARGP Security &amp; Assurance · 15 July 2026</a:t>
+              <a:t>XD House   |   Ma'aden ARGP Security &amp; Assurance   |   15 July 2026</a:t>
             </a:r>
             <a:endParaRPr lang="en-US" sz="900" dirty="0"/>
           </a:p>
@@ -9071,7 +8837,7 @@
                 <a:ea typeface="Calibri" pitchFamily="34" charset="-122"/>
                 <a:cs typeface="Calibri" pitchFamily="34" charset="-120"/>
               </a:rPr>
-              <a:t>Controls built in from the start — not retrofitted for this review</a:t>
+              <a:t>Controls built in from the start, not retrofitted for this review</a:t>
             </a:r>
             <a:endParaRPr lang="en-US" sz="1300" dirty="0"/>
           </a:p>
@@ -9136,18 +8902,18 @@
         </p:nvSpPr>
         <p:spPr>
           <a:xfrm>
-            <a:off x="777240" y="1764792"/>
-            <a:ext cx="384048" cy="384048"/>
+            <a:off x="822960" y="1828800"/>
+            <a:ext cx="146304" cy="146304"/>
           </a:xfrm>
           <a:prstGeom prst="ellipse">
             <a:avLst/>
           </a:prstGeom>
           <a:solidFill>
-            <a:srgbClr val="E5F2E6"/>
+            <a:srgbClr val="2E7D32"/>
           </a:solidFill>
           <a:ln w="12700">
             <a:solidFill>
-              <a:srgbClr val="E5F2E6"/>
+              <a:srgbClr val="2E7D32"/>
             </a:solidFill>
             <a:prstDash val="solid"/>
           </a:ln>
@@ -9161,34 +8927,34 @@
         </p:nvSpPr>
         <p:spPr>
           <a:xfrm>
-            <a:off x="777240" y="1764792"/>
-            <a:ext cx="384048" cy="384048"/>
-          </a:xfrm>
-          <a:prstGeom prst="rect">
-            <a:avLst/>
-          </a:prstGeom>
-          <a:noFill/>
-          <a:ln/>
-        </p:spPr>
-        <p:txBody>
-          <a:bodyPr wrap="square" lIns="0" tIns="0" rIns="0" bIns="0" rtlCol="0" anchor="ctr"/>
-          <a:lstStyle/>
-          <a:p>
-            <a:pPr algn="ctr" indent="0" marL="0">
-              <a:buNone/>
-            </a:pPr>
-            <a:r>
-              <a:rPr lang="en-US" sz="1500" b="1" dirty="0">
-                <a:solidFill>
-                  <a:srgbClr val="2E7D32"/>
-                </a:solidFill>
-                <a:latin typeface="Calibri" pitchFamily="34" charset="0"/>
-                <a:ea typeface="Calibri" pitchFamily="34" charset="-122"/>
-                <a:cs typeface="Calibri" pitchFamily="34" charset="-120"/>
-              </a:rPr>
-              <a:t>✓</a:t>
-            </a:r>
-            <a:endParaRPr lang="en-US" sz="1500" dirty="0"/>
+            <a:off x="1115568" y="1728216"/>
+            <a:ext cx="4663440" cy="274320"/>
+          </a:xfrm>
+          <a:prstGeom prst="rect">
+            <a:avLst/>
+          </a:prstGeom>
+          <a:noFill/>
+          <a:ln/>
+        </p:spPr>
+        <p:txBody>
+          <a:bodyPr wrap="square" lIns="0" tIns="0" rIns="0" bIns="0" rtlCol="0" anchor="ctr"/>
+          <a:lstStyle/>
+          <a:p>
+            <a:pPr indent="0" marL="0">
+              <a:buNone/>
+            </a:pPr>
+            <a:r>
+              <a:rPr lang="en-US" sz="1350" b="1" dirty="0">
+                <a:solidFill>
+                  <a:srgbClr val="1F2024"/>
+                </a:solidFill>
+                <a:latin typeface="Calibri" pitchFamily="34" charset="0"/>
+                <a:ea typeface="Calibri" pitchFamily="34" charset="-122"/>
+                <a:cs typeface="Calibri" pitchFamily="34" charset="-120"/>
+              </a:rPr>
+              <a:t>No SQL injection surface</a:t>
+            </a:r>
+            <a:endParaRPr lang="en-US" sz="1350" dirty="0"/>
           </a:p>
         </p:txBody>
       </p:sp>
@@ -9200,47 +8966,8 @@
         </p:nvSpPr>
         <p:spPr>
           <a:xfrm>
-            <a:off x="1298448" y="1728216"/>
-            <a:ext cx="4480560" cy="274320"/>
-          </a:xfrm>
-          <a:prstGeom prst="rect">
-            <a:avLst/>
-          </a:prstGeom>
-          <a:noFill/>
-          <a:ln/>
-        </p:spPr>
-        <p:txBody>
-          <a:bodyPr wrap="square" lIns="0" tIns="0" rIns="0" bIns="0" rtlCol="0" anchor="ctr"/>
-          <a:lstStyle/>
-          <a:p>
-            <a:pPr indent="0" marL="0">
-              <a:buNone/>
-            </a:pPr>
-            <a:r>
-              <a:rPr lang="en-US" sz="1350" b="1" dirty="0">
-                <a:solidFill>
-                  <a:srgbClr val="1F2024"/>
-                </a:solidFill>
-                <a:latin typeface="Calibri" pitchFamily="34" charset="0"/>
-                <a:ea typeface="Calibri" pitchFamily="34" charset="-122"/>
-                <a:cs typeface="Calibri" pitchFamily="34" charset="-120"/>
-              </a:rPr>
-              <a:t>No SQL injection surface</a:t>
-            </a:r>
-            <a:endParaRPr lang="en-US" sz="1350" dirty="0"/>
-          </a:p>
-        </p:txBody>
-      </p:sp>
-      <p:sp>
-        <p:nvSpPr>
-          <p:cNvPr id="9" name="Text 6"/>
-          <p:cNvSpPr/>
-          <p:nvPr/>
-        </p:nvSpPr>
-        <p:spPr>
-          <a:xfrm>
-            <a:off x="1298448" y="2029968"/>
-            <a:ext cx="4480560" cy="658368"/>
+            <a:off x="1115568" y="2029968"/>
+            <a:ext cx="4663440" cy="658368"/>
           </a:xfrm>
           <a:prstGeom prst="rect">
             <a:avLst/>
@@ -9275,7 +9002,7 @@
       </p:sp>
       <p:sp>
         <p:nvSpPr>
-          <p:cNvPr id="10" name="Shape 7"/>
+          <p:cNvPr id="9" name="Shape 6"/>
           <p:cNvSpPr/>
           <p:nvPr/>
         </p:nvSpPr>
@@ -9302,24 +9029,24 @@
       </p:sp>
       <p:sp>
         <p:nvSpPr>
-          <p:cNvPr id="11" name="Shape 8"/>
-          <p:cNvSpPr/>
-          <p:nvPr/>
-        </p:nvSpPr>
-        <p:spPr>
-          <a:xfrm>
-            <a:off x="6446520" y="1764792"/>
-            <a:ext cx="384048" cy="384048"/>
+          <p:cNvPr id="10" name="Shape 7"/>
+          <p:cNvSpPr/>
+          <p:nvPr/>
+        </p:nvSpPr>
+        <p:spPr>
+          <a:xfrm>
+            <a:off x="6492240" y="1828800"/>
+            <a:ext cx="146304" cy="146304"/>
           </a:xfrm>
           <a:prstGeom prst="ellipse">
             <a:avLst/>
           </a:prstGeom>
           <a:solidFill>
-            <a:srgbClr val="E5F2E6"/>
+            <a:srgbClr val="2E7D32"/>
           </a:solidFill>
           <a:ln w="12700">
             <a:solidFill>
-              <a:srgbClr val="E5F2E6"/>
+              <a:srgbClr val="2E7D32"/>
             </a:solidFill>
             <a:prstDash val="solid"/>
           </a:ln>
@@ -9327,92 +9054,53 @@
       </p:sp>
       <p:sp>
         <p:nvSpPr>
+          <p:cNvPr id="11" name="Text 8"/>
+          <p:cNvSpPr/>
+          <p:nvPr/>
+        </p:nvSpPr>
+        <p:spPr>
+          <a:xfrm>
+            <a:off x="6784848" y="1728216"/>
+            <a:ext cx="4663440" cy="274320"/>
+          </a:xfrm>
+          <a:prstGeom prst="rect">
+            <a:avLst/>
+          </a:prstGeom>
+          <a:noFill/>
+          <a:ln/>
+        </p:spPr>
+        <p:txBody>
+          <a:bodyPr wrap="square" lIns="0" tIns="0" rIns="0" bIns="0" rtlCol="0" anchor="ctr"/>
+          <a:lstStyle/>
+          <a:p>
+            <a:pPr indent="0" marL="0">
+              <a:buNone/>
+            </a:pPr>
+            <a:r>
+              <a:rPr lang="en-US" sz="1350" b="1" dirty="0">
+                <a:solidFill>
+                  <a:srgbClr val="1F2024"/>
+                </a:solidFill>
+                <a:latin typeface="Calibri" pitchFamily="34" charset="0"/>
+                <a:ea typeface="Calibri" pitchFamily="34" charset="-122"/>
+                <a:cs typeface="Calibri" pitchFamily="34" charset="-120"/>
+              </a:rPr>
+              <a:t>Immutable audit trail</a:t>
+            </a:r>
+            <a:endParaRPr lang="en-US" sz="1350" dirty="0"/>
+          </a:p>
+        </p:txBody>
+      </p:sp>
+      <p:sp>
+        <p:nvSpPr>
           <p:cNvPr id="12" name="Text 9"/>
           <p:cNvSpPr/>
           <p:nvPr/>
         </p:nvSpPr>
         <p:spPr>
           <a:xfrm>
-            <a:off x="6446520" y="1764792"/>
-            <a:ext cx="384048" cy="384048"/>
-          </a:xfrm>
-          <a:prstGeom prst="rect">
-            <a:avLst/>
-          </a:prstGeom>
-          <a:noFill/>
-          <a:ln/>
-        </p:spPr>
-        <p:txBody>
-          <a:bodyPr wrap="square" lIns="0" tIns="0" rIns="0" bIns="0" rtlCol="0" anchor="ctr"/>
-          <a:lstStyle/>
-          <a:p>
-            <a:pPr algn="ctr" indent="0" marL="0">
-              <a:buNone/>
-            </a:pPr>
-            <a:r>
-              <a:rPr lang="en-US" sz="1500" b="1" dirty="0">
-                <a:solidFill>
-                  <a:srgbClr val="2E7D32"/>
-                </a:solidFill>
-                <a:latin typeface="Calibri" pitchFamily="34" charset="0"/>
-                <a:ea typeface="Calibri" pitchFamily="34" charset="-122"/>
-                <a:cs typeface="Calibri" pitchFamily="34" charset="-120"/>
-              </a:rPr>
-              <a:t>✓</a:t>
-            </a:r>
-            <a:endParaRPr lang="en-US" sz="1500" dirty="0"/>
-          </a:p>
-        </p:txBody>
-      </p:sp>
-      <p:sp>
-        <p:nvSpPr>
-          <p:cNvPr id="13" name="Text 10"/>
-          <p:cNvSpPr/>
-          <p:nvPr/>
-        </p:nvSpPr>
-        <p:spPr>
-          <a:xfrm>
-            <a:off x="6967728" y="1728216"/>
-            <a:ext cx="4480560" cy="274320"/>
-          </a:xfrm>
-          <a:prstGeom prst="rect">
-            <a:avLst/>
-          </a:prstGeom>
-          <a:noFill/>
-          <a:ln/>
-        </p:spPr>
-        <p:txBody>
-          <a:bodyPr wrap="square" lIns="0" tIns="0" rIns="0" bIns="0" rtlCol="0" anchor="ctr"/>
-          <a:lstStyle/>
-          <a:p>
-            <a:pPr indent="0" marL="0">
-              <a:buNone/>
-            </a:pPr>
-            <a:r>
-              <a:rPr lang="en-US" sz="1350" b="1" dirty="0">
-                <a:solidFill>
-                  <a:srgbClr val="1F2024"/>
-                </a:solidFill>
-                <a:latin typeface="Calibri" pitchFamily="34" charset="0"/>
-                <a:ea typeface="Calibri" pitchFamily="34" charset="-122"/>
-                <a:cs typeface="Calibri" pitchFamily="34" charset="-120"/>
-              </a:rPr>
-              <a:t>Immutable audit trail</a:t>
-            </a:r>
-            <a:endParaRPr lang="en-US" sz="1350" dirty="0"/>
-          </a:p>
-        </p:txBody>
-      </p:sp>
-      <p:sp>
-        <p:nvSpPr>
-          <p:cNvPr id="14" name="Text 11"/>
-          <p:cNvSpPr/>
-          <p:nvPr/>
-        </p:nvSpPr>
-        <p:spPr>
-          <a:xfrm>
-            <a:off x="6967728" y="2029968"/>
-            <a:ext cx="4480560" cy="658368"/>
+            <a:off x="6784848" y="2029968"/>
+            <a:ext cx="4663440" cy="658368"/>
           </a:xfrm>
           <a:prstGeom prst="rect">
             <a:avLst/>
@@ -9439,7 +9127,7 @@
                 <a:ea typeface="Calibri" pitchFamily="34" charset="-122"/>
                 <a:cs typeface="Calibri" pitchFamily="34" charset="-120"/>
               </a:rPr>
-              <a:t>Every mutation records actor, action, before/after value and timestamp — the control SoW §3.1.4 requires.</a:t>
+              <a:t>Every mutation records actor, action, before and after value, and timestamp. This is the control SoW §3.1.4 requires.</a:t>
             </a:r>
             <a:endParaRPr lang="en-US" sz="1100" dirty="0"/>
           </a:p>
@@ -9447,7 +9135,7 @@
       </p:sp>
       <p:sp>
         <p:nvSpPr>
-          <p:cNvPr id="15" name="Shape 12"/>
+          <p:cNvPr id="13" name="Shape 10"/>
           <p:cNvSpPr/>
           <p:nvPr/>
         </p:nvSpPr>
@@ -9474,24 +9162,24 @@
       </p:sp>
       <p:sp>
         <p:nvSpPr>
-          <p:cNvPr id="16" name="Shape 13"/>
-          <p:cNvSpPr/>
-          <p:nvPr/>
-        </p:nvSpPr>
-        <p:spPr>
-          <a:xfrm>
-            <a:off x="777240" y="3246120"/>
-            <a:ext cx="384048" cy="384048"/>
+          <p:cNvPr id="14" name="Shape 11"/>
+          <p:cNvSpPr/>
+          <p:nvPr/>
+        </p:nvSpPr>
+        <p:spPr>
+          <a:xfrm>
+            <a:off x="822960" y="3310128"/>
+            <a:ext cx="146304" cy="146304"/>
           </a:xfrm>
           <a:prstGeom prst="ellipse">
             <a:avLst/>
           </a:prstGeom>
           <a:solidFill>
-            <a:srgbClr val="E5F2E6"/>
+            <a:srgbClr val="2E7D32"/>
           </a:solidFill>
           <a:ln w="12700">
             <a:solidFill>
-              <a:srgbClr val="E5F2E6"/>
+              <a:srgbClr val="2E7D32"/>
             </a:solidFill>
             <a:prstDash val="solid"/>
           </a:ln>
@@ -9499,53 +9187,14 @@
       </p:sp>
       <p:sp>
         <p:nvSpPr>
-          <p:cNvPr id="17" name="Text 14"/>
-          <p:cNvSpPr/>
-          <p:nvPr/>
-        </p:nvSpPr>
-        <p:spPr>
-          <a:xfrm>
-            <a:off x="777240" y="3246120"/>
-            <a:ext cx="384048" cy="384048"/>
-          </a:xfrm>
-          <a:prstGeom prst="rect">
-            <a:avLst/>
-          </a:prstGeom>
-          <a:noFill/>
-          <a:ln/>
-        </p:spPr>
-        <p:txBody>
-          <a:bodyPr wrap="square" lIns="0" tIns="0" rIns="0" bIns="0" rtlCol="0" anchor="ctr"/>
-          <a:lstStyle/>
-          <a:p>
-            <a:pPr algn="ctr" indent="0" marL="0">
-              <a:buNone/>
-            </a:pPr>
-            <a:r>
-              <a:rPr lang="en-US" sz="1500" b="1" dirty="0">
-                <a:solidFill>
-                  <a:srgbClr val="2E7D32"/>
-                </a:solidFill>
-                <a:latin typeface="Calibri" pitchFamily="34" charset="0"/>
-                <a:ea typeface="Calibri" pitchFamily="34" charset="-122"/>
-                <a:cs typeface="Calibri" pitchFamily="34" charset="-120"/>
-              </a:rPr>
-              <a:t>✓</a:t>
-            </a:r>
-            <a:endParaRPr lang="en-US" sz="1500" dirty="0"/>
-          </a:p>
-        </p:txBody>
-      </p:sp>
-      <p:sp>
-        <p:nvSpPr>
-          <p:cNvPr id="18" name="Text 15"/>
-          <p:cNvSpPr/>
-          <p:nvPr/>
-        </p:nvSpPr>
-        <p:spPr>
-          <a:xfrm>
-            <a:off x="1298448" y="3209544"/>
-            <a:ext cx="4480560" cy="274320"/>
+          <p:cNvPr id="15" name="Text 12"/>
+          <p:cNvSpPr/>
+          <p:nvPr/>
+        </p:nvSpPr>
+        <p:spPr>
+          <a:xfrm>
+            <a:off x="1115568" y="3209544"/>
+            <a:ext cx="4663440" cy="274320"/>
           </a:xfrm>
           <a:prstGeom prst="rect">
             <a:avLst/>
@@ -9577,14 +9226,14 @@
       </p:sp>
       <p:sp>
         <p:nvSpPr>
-          <p:cNvPr id="19" name="Text 16"/>
-          <p:cNvSpPr/>
-          <p:nvPr/>
-        </p:nvSpPr>
-        <p:spPr>
-          <a:xfrm>
-            <a:off x="1298448" y="3511296"/>
-            <a:ext cx="4480560" cy="658368"/>
+          <p:cNvPr id="16" name="Text 13"/>
+          <p:cNvSpPr/>
+          <p:nvPr/>
+        </p:nvSpPr>
+        <p:spPr>
+          <a:xfrm>
+            <a:off x="1115568" y="3511296"/>
+            <a:ext cx="4663440" cy="658368"/>
           </a:xfrm>
           <a:prstGeom prst="rect">
             <a:avLst/>
@@ -9619,7 +9268,7 @@
       </p:sp>
       <p:sp>
         <p:nvSpPr>
-          <p:cNvPr id="20" name="Shape 17"/>
+          <p:cNvPr id="17" name="Shape 14"/>
           <p:cNvSpPr/>
           <p:nvPr/>
         </p:nvSpPr>
@@ -9646,24 +9295,24 @@
       </p:sp>
       <p:sp>
         <p:nvSpPr>
-          <p:cNvPr id="21" name="Shape 18"/>
-          <p:cNvSpPr/>
-          <p:nvPr/>
-        </p:nvSpPr>
-        <p:spPr>
-          <a:xfrm>
-            <a:off x="6446520" y="3246120"/>
-            <a:ext cx="384048" cy="384048"/>
+          <p:cNvPr id="18" name="Shape 15"/>
+          <p:cNvSpPr/>
+          <p:nvPr/>
+        </p:nvSpPr>
+        <p:spPr>
+          <a:xfrm>
+            <a:off x="6492240" y="3310128"/>
+            <a:ext cx="146304" cy="146304"/>
           </a:xfrm>
           <a:prstGeom prst="ellipse">
             <a:avLst/>
           </a:prstGeom>
           <a:solidFill>
-            <a:srgbClr val="E5F2E6"/>
+            <a:srgbClr val="2E7D32"/>
           </a:solidFill>
           <a:ln w="12700">
             <a:solidFill>
-              <a:srgbClr val="E5F2E6"/>
+              <a:srgbClr val="2E7D32"/>
             </a:solidFill>
             <a:prstDash val="solid"/>
           </a:ln>
@@ -9671,53 +9320,14 @@
       </p:sp>
       <p:sp>
         <p:nvSpPr>
-          <p:cNvPr id="22" name="Text 19"/>
-          <p:cNvSpPr/>
-          <p:nvPr/>
-        </p:nvSpPr>
-        <p:spPr>
-          <a:xfrm>
-            <a:off x="6446520" y="3246120"/>
-            <a:ext cx="384048" cy="384048"/>
-          </a:xfrm>
-          <a:prstGeom prst="rect">
-            <a:avLst/>
-          </a:prstGeom>
-          <a:noFill/>
-          <a:ln/>
-        </p:spPr>
-        <p:txBody>
-          <a:bodyPr wrap="square" lIns="0" tIns="0" rIns="0" bIns="0" rtlCol="0" anchor="ctr"/>
-          <a:lstStyle/>
-          <a:p>
-            <a:pPr algn="ctr" indent="0" marL="0">
-              <a:buNone/>
-            </a:pPr>
-            <a:r>
-              <a:rPr lang="en-US" sz="1500" b="1" dirty="0">
-                <a:solidFill>
-                  <a:srgbClr val="2E7D32"/>
-                </a:solidFill>
-                <a:latin typeface="Calibri" pitchFamily="34" charset="0"/>
-                <a:ea typeface="Calibri" pitchFamily="34" charset="-122"/>
-                <a:cs typeface="Calibri" pitchFamily="34" charset="-120"/>
-              </a:rPr>
-              <a:t>✓</a:t>
-            </a:r>
-            <a:endParaRPr lang="en-US" sz="1500" dirty="0"/>
-          </a:p>
-        </p:txBody>
-      </p:sp>
-      <p:sp>
-        <p:nvSpPr>
-          <p:cNvPr id="23" name="Text 20"/>
-          <p:cNvSpPr/>
-          <p:nvPr/>
-        </p:nvSpPr>
-        <p:spPr>
-          <a:xfrm>
-            <a:off x="6967728" y="3209544"/>
-            <a:ext cx="4480560" cy="274320"/>
+          <p:cNvPr id="19" name="Text 16"/>
+          <p:cNvSpPr/>
+          <p:nvPr/>
+        </p:nvSpPr>
+        <p:spPr>
+          <a:xfrm>
+            <a:off x="6784848" y="3209544"/>
+            <a:ext cx="4663440" cy="274320"/>
           </a:xfrm>
           <a:prstGeom prst="rect">
             <a:avLst/>
@@ -9749,14 +9359,14 @@
       </p:sp>
       <p:sp>
         <p:nvSpPr>
-          <p:cNvPr id="24" name="Text 21"/>
-          <p:cNvSpPr/>
-          <p:nvPr/>
-        </p:nvSpPr>
-        <p:spPr>
-          <a:xfrm>
-            <a:off x="6967728" y="3511296"/>
-            <a:ext cx="4480560" cy="658368"/>
+          <p:cNvPr id="20" name="Text 17"/>
+          <p:cNvSpPr/>
+          <p:nvPr/>
+        </p:nvSpPr>
+        <p:spPr>
+          <a:xfrm>
+            <a:off x="6784848" y="3511296"/>
+            <a:ext cx="4663440" cy="658368"/>
           </a:xfrm>
           <a:prstGeom prst="rect">
             <a:avLst/>
@@ -9783,7 +9393,7 @@
                 <a:ea typeface="Calibri" pitchFamily="34" charset="-122"/>
                 <a:cs typeface="Calibri" pitchFamily="34" charset="-120"/>
               </a:rPr>
-              <a:t>Role gates enforced in the API, not hidden UI. A Viewer attempting to mutate receives 403 — reproduced.</a:t>
+              <a:t>Role gates enforced in the API, not hidden UI. A Viewer attempting to mutate receives 403, reproduced.</a:t>
             </a:r>
             <a:endParaRPr lang="en-US" sz="1100" dirty="0"/>
           </a:p>
@@ -9791,7 +9401,7 @@
       </p:sp>
       <p:sp>
         <p:nvSpPr>
-          <p:cNvPr id="25" name="Shape 22"/>
+          <p:cNvPr id="21" name="Shape 18"/>
           <p:cNvSpPr/>
           <p:nvPr/>
         </p:nvSpPr>
@@ -9818,24 +9428,24 @@
       </p:sp>
       <p:sp>
         <p:nvSpPr>
-          <p:cNvPr id="26" name="Shape 23"/>
-          <p:cNvSpPr/>
-          <p:nvPr/>
-        </p:nvSpPr>
-        <p:spPr>
-          <a:xfrm>
-            <a:off x="777240" y="4727448"/>
-            <a:ext cx="384048" cy="384048"/>
+          <p:cNvPr id="22" name="Shape 19"/>
+          <p:cNvSpPr/>
+          <p:nvPr/>
+        </p:nvSpPr>
+        <p:spPr>
+          <a:xfrm>
+            <a:off x="822960" y="4791456"/>
+            <a:ext cx="146304" cy="146304"/>
           </a:xfrm>
           <a:prstGeom prst="ellipse">
             <a:avLst/>
           </a:prstGeom>
           <a:solidFill>
-            <a:srgbClr val="E5F2E6"/>
+            <a:srgbClr val="2E7D32"/>
           </a:solidFill>
           <a:ln w="12700">
             <a:solidFill>
-              <a:srgbClr val="E5F2E6"/>
+              <a:srgbClr val="2E7D32"/>
             </a:solidFill>
             <a:prstDash val="solid"/>
           </a:ln>
@@ -9843,53 +9453,14 @@
       </p:sp>
       <p:sp>
         <p:nvSpPr>
-          <p:cNvPr id="27" name="Text 24"/>
-          <p:cNvSpPr/>
-          <p:nvPr/>
-        </p:nvSpPr>
-        <p:spPr>
-          <a:xfrm>
-            <a:off x="777240" y="4727448"/>
-            <a:ext cx="384048" cy="384048"/>
-          </a:xfrm>
-          <a:prstGeom prst="rect">
-            <a:avLst/>
-          </a:prstGeom>
-          <a:noFill/>
-          <a:ln/>
-        </p:spPr>
-        <p:txBody>
-          <a:bodyPr wrap="square" lIns="0" tIns="0" rIns="0" bIns="0" rtlCol="0" anchor="ctr"/>
-          <a:lstStyle/>
-          <a:p>
-            <a:pPr algn="ctr" indent="0" marL="0">
-              <a:buNone/>
-            </a:pPr>
-            <a:r>
-              <a:rPr lang="en-US" sz="1500" b="1" dirty="0">
-                <a:solidFill>
-                  <a:srgbClr val="2E7D32"/>
-                </a:solidFill>
-                <a:latin typeface="Calibri" pitchFamily="34" charset="0"/>
-                <a:ea typeface="Calibri" pitchFamily="34" charset="-122"/>
-                <a:cs typeface="Calibri" pitchFamily="34" charset="-120"/>
-              </a:rPr>
-              <a:t>✓</a:t>
-            </a:r>
-            <a:endParaRPr lang="en-US" sz="1500" dirty="0"/>
-          </a:p>
-        </p:txBody>
-      </p:sp>
-      <p:sp>
-        <p:nvSpPr>
-          <p:cNvPr id="28" name="Text 25"/>
-          <p:cNvSpPr/>
-          <p:nvPr/>
-        </p:nvSpPr>
-        <p:spPr>
-          <a:xfrm>
-            <a:off x="1298448" y="4690872"/>
-            <a:ext cx="4480560" cy="274320"/>
+          <p:cNvPr id="23" name="Text 20"/>
+          <p:cNvSpPr/>
+          <p:nvPr/>
+        </p:nvSpPr>
+        <p:spPr>
+          <a:xfrm>
+            <a:off x="1115568" y="4690872"/>
+            <a:ext cx="4663440" cy="274320"/>
           </a:xfrm>
           <a:prstGeom prst="rect">
             <a:avLst/>
@@ -9921,14 +9492,14 @@
       </p:sp>
       <p:sp>
         <p:nvSpPr>
-          <p:cNvPr id="29" name="Text 26"/>
-          <p:cNvSpPr/>
-          <p:nvPr/>
-        </p:nvSpPr>
-        <p:spPr>
-          <a:xfrm>
-            <a:off x="1298448" y="4992624"/>
-            <a:ext cx="4480560" cy="658368"/>
+          <p:cNvPr id="24" name="Text 21"/>
+          <p:cNvSpPr/>
+          <p:nvPr/>
+        </p:nvSpPr>
+        <p:spPr>
+          <a:xfrm>
+            <a:off x="1115568" y="4992624"/>
+            <a:ext cx="4663440" cy="658368"/>
           </a:xfrm>
           <a:prstGeom prst="rect">
             <a:avLst/>
@@ -9963,7 +9534,7 @@
       </p:sp>
       <p:sp>
         <p:nvSpPr>
-          <p:cNvPr id="30" name="Shape 27"/>
+          <p:cNvPr id="25" name="Shape 22"/>
           <p:cNvSpPr/>
           <p:nvPr/>
         </p:nvSpPr>
@@ -9990,24 +9561,24 @@
       </p:sp>
       <p:sp>
         <p:nvSpPr>
-          <p:cNvPr id="31" name="Shape 28"/>
-          <p:cNvSpPr/>
-          <p:nvPr/>
-        </p:nvSpPr>
-        <p:spPr>
-          <a:xfrm>
-            <a:off x="6446520" y="4727448"/>
-            <a:ext cx="384048" cy="384048"/>
+          <p:cNvPr id="26" name="Shape 23"/>
+          <p:cNvSpPr/>
+          <p:nvPr/>
+        </p:nvSpPr>
+        <p:spPr>
+          <a:xfrm>
+            <a:off x="6492240" y="4791456"/>
+            <a:ext cx="146304" cy="146304"/>
           </a:xfrm>
           <a:prstGeom prst="ellipse">
             <a:avLst/>
           </a:prstGeom>
           <a:solidFill>
-            <a:srgbClr val="E5F2E6"/>
+            <a:srgbClr val="2E7D32"/>
           </a:solidFill>
           <a:ln w="12700">
             <a:solidFill>
-              <a:srgbClr val="E5F2E6"/>
+              <a:srgbClr val="2E7D32"/>
             </a:solidFill>
             <a:prstDash val="solid"/>
           </a:ln>
@@ -10015,53 +9586,14 @@
       </p:sp>
       <p:sp>
         <p:nvSpPr>
-          <p:cNvPr id="32" name="Text 29"/>
-          <p:cNvSpPr/>
-          <p:nvPr/>
-        </p:nvSpPr>
-        <p:spPr>
-          <a:xfrm>
-            <a:off x="6446520" y="4727448"/>
-            <a:ext cx="384048" cy="384048"/>
-          </a:xfrm>
-          <a:prstGeom prst="rect">
-            <a:avLst/>
-          </a:prstGeom>
-          <a:noFill/>
-          <a:ln/>
-        </p:spPr>
-        <p:txBody>
-          <a:bodyPr wrap="square" lIns="0" tIns="0" rIns="0" bIns="0" rtlCol="0" anchor="ctr"/>
-          <a:lstStyle/>
-          <a:p>
-            <a:pPr algn="ctr" indent="0" marL="0">
-              <a:buNone/>
-            </a:pPr>
-            <a:r>
-              <a:rPr lang="en-US" sz="1500" b="1" dirty="0">
-                <a:solidFill>
-                  <a:srgbClr val="2E7D32"/>
-                </a:solidFill>
-                <a:latin typeface="Calibri" pitchFamily="34" charset="0"/>
-                <a:ea typeface="Calibri" pitchFamily="34" charset="-122"/>
-                <a:cs typeface="Calibri" pitchFamily="34" charset="-120"/>
-              </a:rPr>
-              <a:t>✓</a:t>
-            </a:r>
-            <a:endParaRPr lang="en-US" sz="1500" dirty="0"/>
-          </a:p>
-        </p:txBody>
-      </p:sp>
-      <p:sp>
-        <p:nvSpPr>
-          <p:cNvPr id="33" name="Text 30"/>
-          <p:cNvSpPr/>
-          <p:nvPr/>
-        </p:nvSpPr>
-        <p:spPr>
-          <a:xfrm>
-            <a:off x="6967728" y="4690872"/>
-            <a:ext cx="4480560" cy="274320"/>
+          <p:cNvPr id="27" name="Text 24"/>
+          <p:cNvSpPr/>
+          <p:nvPr/>
+        </p:nvSpPr>
+        <p:spPr>
+          <a:xfrm>
+            <a:off x="6784848" y="4690872"/>
+            <a:ext cx="4663440" cy="274320"/>
           </a:xfrm>
           <a:prstGeom prst="rect">
             <a:avLst/>
@@ -10093,14 +9625,14 @@
       </p:sp>
       <p:sp>
         <p:nvSpPr>
-          <p:cNvPr id="34" name="Text 31"/>
-          <p:cNvSpPr/>
-          <p:nvPr/>
-        </p:nvSpPr>
-        <p:spPr>
-          <a:xfrm>
-            <a:off x="6967728" y="4992624"/>
-            <a:ext cx="4480560" cy="658368"/>
+          <p:cNvPr id="28" name="Text 25"/>
+          <p:cNvSpPr/>
+          <p:nvPr/>
+        </p:nvSpPr>
+        <p:spPr>
+          <a:xfrm>
+            <a:off x="6784848" y="4992624"/>
+            <a:ext cx="4663440" cy="658368"/>
           </a:xfrm>
           <a:prstGeom prst="rect">
             <a:avLst/>
@@ -10127,7 +9659,7 @@
                 <a:ea typeface="Calibri" pitchFamily="34" charset="-122"/>
                 <a:cs typeface="Calibri" pitchFamily="34" charset="-120"/>
               </a:rPr>
-              <a:t>With no API key the client is never constructed; routes return a clean 503. The key never reaches the browser.</a:t>
+              <a:t>With no API key the client is never constructed and routes return a clean 503. The key never reaches the browser.</a:t>
             </a:r>
             <a:endParaRPr lang="en-US" sz="1100" dirty="0"/>
           </a:p>
@@ -10135,7 +9667,7 @@
       </p:sp>
       <p:sp>
         <p:nvSpPr>
-          <p:cNvPr id="35" name="Text 32"/>
+          <p:cNvPr id="29" name="Text 26"/>
           <p:cNvSpPr/>
           <p:nvPr/>
         </p:nvSpPr>
@@ -10166,7 +9698,7 @@
                 <a:ea typeface="Calibri" pitchFamily="34" charset="-122"/>
                 <a:cs typeface="Calibri" pitchFamily="34" charset="-120"/>
               </a:rPr>
-              <a:t>XD House · Ma'aden ARGP Security &amp; Assurance · 15 July 2026</a:t>
+              <a:t>XD House   |   Ma'aden ARGP Security &amp; Assurance   |   15 July 2026</a:t>
             </a:r>
             <a:endParaRPr lang="en-US" sz="900" dirty="0"/>
           </a:p>
@@ -10314,14 +9846,14 @@
         </p:nvSpPr>
         <p:spPr>
           <a:xfrm>
-            <a:off x="566928" y="1572768"/>
-            <a:ext cx="274320" cy="274320"/>
+            <a:off x="603504" y="1636776"/>
+            <a:ext cx="146304" cy="146304"/>
           </a:xfrm>
           <a:prstGeom prst="ellipse">
             <a:avLst/>
           </a:prstGeom>
           <a:solidFill>
-            <a:srgbClr val="23242A"/>
+            <a:srgbClr val="C9A227"/>
           </a:solidFill>
           <a:ln w="12700">
             <a:solidFill>
@@ -10339,45 +9871,6 @@
         </p:nvSpPr>
         <p:spPr>
           <a:xfrm>
-            <a:off x="566928" y="1572768"/>
-            <a:ext cx="274320" cy="274320"/>
-          </a:xfrm>
-          <a:prstGeom prst="rect">
-            <a:avLst/>
-          </a:prstGeom>
-          <a:noFill/>
-          <a:ln/>
-        </p:spPr>
-        <p:txBody>
-          <a:bodyPr wrap="square" lIns="0" tIns="0" rIns="0" bIns="0" rtlCol="0" anchor="ctr"/>
-          <a:lstStyle/>
-          <a:p>
-            <a:pPr algn="ctr" indent="0" marL="0">
-              <a:buNone/>
-            </a:pPr>
-            <a:r>
-              <a:rPr lang="en-US" sz="1100" b="1" dirty="0">
-                <a:solidFill>
-                  <a:srgbClr val="C9A227"/>
-                </a:solidFill>
-                <a:latin typeface="Calibri" pitchFamily="34" charset="0"/>
-                <a:ea typeface="Calibri" pitchFamily="34" charset="-122"/>
-                <a:cs typeface="Calibri" pitchFamily="34" charset="-120"/>
-              </a:rPr>
-              <a:t>✓</a:t>
-            </a:r>
-            <a:endParaRPr lang="en-US" sz="1100" dirty="0"/>
-          </a:p>
-        </p:txBody>
-      </p:sp>
-      <p:sp>
-        <p:nvSpPr>
-          <p:cNvPr id="7" name="Text 4"/>
-          <p:cNvSpPr/>
-          <p:nvPr/>
-        </p:nvSpPr>
-        <p:spPr>
-          <a:xfrm>
             <a:off x="987552" y="1463040"/>
             <a:ext cx="4206240" cy="475488"/>
           </a:xfrm>
@@ -10403,7 +9896,7 @@
                 <a:ea typeface="Calibri" pitchFamily="34" charset="-122"/>
                 <a:cs typeface="Calibri" pitchFamily="34" charset="-120"/>
               </a:rPr>
-              <a:t>Data residency — Kingdom of Saudi Arabia</a:t>
+              <a:t>Data residency: Kingdom of Saudi Arabia</a:t>
             </a:r>
             <a:endParaRPr lang="en-US" sz="1300" dirty="0"/>
           </a:p>
@@ -10411,7 +9904,7 @@
       </p:sp>
       <p:sp>
         <p:nvSpPr>
-          <p:cNvPr id="8" name="Text 5"/>
+          <p:cNvPr id="7" name="Text 4"/>
           <p:cNvSpPr/>
           <p:nvPr/>
         </p:nvSpPr>
@@ -10442,7 +9935,7 @@
                 <a:ea typeface="Calibri" pitchFamily="34" charset="-122"/>
                 <a:cs typeface="Calibri" pitchFamily="34" charset="-120"/>
               </a:rPr>
-              <a:t>Azure App Service + Azure Database for PostgreSQL, Riyadh region. No Ma'aden production data offshore.</a:t>
+              <a:t>Azure App Service and Azure Database for PostgreSQL, Riyadh region. No Ma'aden production data offshore.</a:t>
             </a:r>
             <a:endParaRPr lang="en-US" sz="1150" dirty="0"/>
           </a:p>
@@ -10450,20 +9943,20 @@
       </p:sp>
       <p:sp>
         <p:nvSpPr>
-          <p:cNvPr id="9" name="Shape 6"/>
-          <p:cNvSpPr/>
-          <p:nvPr/>
-        </p:nvSpPr>
-        <p:spPr>
-          <a:xfrm>
-            <a:off x="566928" y="2194560"/>
-            <a:ext cx="274320" cy="274320"/>
+          <p:cNvPr id="8" name="Shape 5"/>
+          <p:cNvSpPr/>
+          <p:nvPr/>
+        </p:nvSpPr>
+        <p:spPr>
+          <a:xfrm>
+            <a:off x="603504" y="2258568"/>
+            <a:ext cx="146304" cy="146304"/>
           </a:xfrm>
           <a:prstGeom prst="ellipse">
             <a:avLst/>
           </a:prstGeom>
           <a:solidFill>
-            <a:srgbClr val="23242A"/>
+            <a:srgbClr val="C9A227"/>
           </a:solidFill>
           <a:ln w="12700">
             <a:solidFill>
@@ -10475,46 +9968,7 @@
       </p:sp>
       <p:sp>
         <p:nvSpPr>
-          <p:cNvPr id="10" name="Text 7"/>
-          <p:cNvSpPr/>
-          <p:nvPr/>
-        </p:nvSpPr>
-        <p:spPr>
-          <a:xfrm>
-            <a:off x="566928" y="2194560"/>
-            <a:ext cx="274320" cy="274320"/>
-          </a:xfrm>
-          <a:prstGeom prst="rect">
-            <a:avLst/>
-          </a:prstGeom>
-          <a:noFill/>
-          <a:ln/>
-        </p:spPr>
-        <p:txBody>
-          <a:bodyPr wrap="square" lIns="0" tIns="0" rIns="0" bIns="0" rtlCol="0" anchor="ctr"/>
-          <a:lstStyle/>
-          <a:p>
-            <a:pPr algn="ctr" indent="0" marL="0">
-              <a:buNone/>
-            </a:pPr>
-            <a:r>
-              <a:rPr lang="en-US" sz="1100" b="1" dirty="0">
-                <a:solidFill>
-                  <a:srgbClr val="C9A227"/>
-                </a:solidFill>
-                <a:latin typeface="Calibri" pitchFamily="34" charset="0"/>
-                <a:ea typeface="Calibri" pitchFamily="34" charset="-122"/>
-                <a:cs typeface="Calibri" pitchFamily="34" charset="-120"/>
-              </a:rPr>
-              <a:t>✓</a:t>
-            </a:r>
-            <a:endParaRPr lang="en-US" sz="1100" dirty="0"/>
-          </a:p>
-        </p:txBody>
-      </p:sp>
-      <p:sp>
-        <p:nvSpPr>
-          <p:cNvPr id="11" name="Text 8"/>
+          <p:cNvPr id="9" name="Text 6"/>
           <p:cNvSpPr/>
           <p:nvPr/>
         </p:nvSpPr>
@@ -10545,7 +9999,7 @@
                 <a:ea typeface="Calibri" pitchFamily="34" charset="-122"/>
                 <a:cs typeface="Calibri" pitchFamily="34" charset="-120"/>
               </a:rPr>
-              <a:t>Azure AD + ADFS SSO, SAML 2.0, MFA</a:t>
+              <a:t>Azure AD and ADFS SSO, SAML 2.0, MFA</a:t>
             </a:r>
             <a:endParaRPr lang="en-US" sz="1300" dirty="0"/>
           </a:p>
@@ -10553,7 +10007,7 @@
       </p:sp>
       <p:sp>
         <p:nvSpPr>
-          <p:cNvPr id="12" name="Text 9"/>
+          <p:cNvPr id="10" name="Text 7"/>
           <p:cNvSpPr/>
           <p:nvPr/>
         </p:nvSpPr>
@@ -10592,20 +10046,20 @@
       </p:sp>
       <p:sp>
         <p:nvSpPr>
-          <p:cNvPr id="13" name="Shape 10"/>
-          <p:cNvSpPr/>
-          <p:nvPr/>
-        </p:nvSpPr>
-        <p:spPr>
-          <a:xfrm>
-            <a:off x="566928" y="2816352"/>
-            <a:ext cx="274320" cy="274320"/>
+          <p:cNvPr id="11" name="Shape 8"/>
+          <p:cNvSpPr/>
+          <p:nvPr/>
+        </p:nvSpPr>
+        <p:spPr>
+          <a:xfrm>
+            <a:off x="603504" y="2880360"/>
+            <a:ext cx="146304" cy="146304"/>
           </a:xfrm>
           <a:prstGeom prst="ellipse">
             <a:avLst/>
           </a:prstGeom>
           <a:solidFill>
-            <a:srgbClr val="23242A"/>
+            <a:srgbClr val="C9A227"/>
           </a:solidFill>
           <a:ln w="12700">
             <a:solidFill>
@@ -10617,46 +10071,7 @@
       </p:sp>
       <p:sp>
         <p:nvSpPr>
-          <p:cNvPr id="14" name="Text 11"/>
-          <p:cNvSpPr/>
-          <p:nvPr/>
-        </p:nvSpPr>
-        <p:spPr>
-          <a:xfrm>
-            <a:off x="566928" y="2816352"/>
-            <a:ext cx="274320" cy="274320"/>
-          </a:xfrm>
-          <a:prstGeom prst="rect">
-            <a:avLst/>
-          </a:prstGeom>
-          <a:noFill/>
-          <a:ln/>
-        </p:spPr>
-        <p:txBody>
-          <a:bodyPr wrap="square" lIns="0" tIns="0" rIns="0" bIns="0" rtlCol="0" anchor="ctr"/>
-          <a:lstStyle/>
-          <a:p>
-            <a:pPr algn="ctr" indent="0" marL="0">
-              <a:buNone/>
-            </a:pPr>
-            <a:r>
-              <a:rPr lang="en-US" sz="1100" b="1" dirty="0">
-                <a:solidFill>
-                  <a:srgbClr val="C9A227"/>
-                </a:solidFill>
-                <a:latin typeface="Calibri" pitchFamily="34" charset="0"/>
-                <a:ea typeface="Calibri" pitchFamily="34" charset="-122"/>
-                <a:cs typeface="Calibri" pitchFamily="34" charset="-120"/>
-              </a:rPr>
-              <a:t>✓</a:t>
-            </a:r>
-            <a:endParaRPr lang="en-US" sz="1100" dirty="0"/>
-          </a:p>
-        </p:txBody>
-      </p:sp>
-      <p:sp>
-        <p:nvSpPr>
-          <p:cNvPr id="15" name="Text 12"/>
+          <p:cNvPr id="12" name="Text 9"/>
           <p:cNvSpPr/>
           <p:nvPr/>
         </p:nvSpPr>
@@ -10695,7 +10110,7 @@
       </p:sp>
       <p:sp>
         <p:nvSpPr>
-          <p:cNvPr id="16" name="Text 13"/>
+          <p:cNvPr id="13" name="Text 10"/>
           <p:cNvSpPr/>
           <p:nvPr/>
         </p:nvSpPr>
@@ -10726,7 +10141,7 @@
                 <a:ea typeface="Calibri" pitchFamily="34" charset="-122"/>
                 <a:cs typeface="Calibri" pitchFamily="34" charset="-120"/>
               </a:rPr>
-              <a:t>TLS 1.2+ browser→app→database, HSTS at the edge. Azure TDE at rest. Keys in Azure Key Vault.</a:t>
+              <a:t>TLS 1.2+ from browser to app to database, HSTS at the edge. Azure TDE at rest. Keys in Azure Key Vault.</a:t>
             </a:r>
             <a:endParaRPr lang="en-US" sz="1150" dirty="0"/>
           </a:p>
@@ -10734,20 +10149,20 @@
       </p:sp>
       <p:sp>
         <p:nvSpPr>
-          <p:cNvPr id="17" name="Shape 14"/>
-          <p:cNvSpPr/>
-          <p:nvPr/>
-        </p:nvSpPr>
-        <p:spPr>
-          <a:xfrm>
-            <a:off x="566928" y="3438144"/>
-            <a:ext cx="274320" cy="274320"/>
+          <p:cNvPr id="14" name="Shape 11"/>
+          <p:cNvSpPr/>
+          <p:nvPr/>
+        </p:nvSpPr>
+        <p:spPr>
+          <a:xfrm>
+            <a:off x="603504" y="3502152"/>
+            <a:ext cx="146304" cy="146304"/>
           </a:xfrm>
           <a:prstGeom prst="ellipse">
             <a:avLst/>
           </a:prstGeom>
           <a:solidFill>
-            <a:srgbClr val="23242A"/>
+            <a:srgbClr val="C9A227"/>
           </a:solidFill>
           <a:ln w="12700">
             <a:solidFill>
@@ -10759,46 +10174,7 @@
       </p:sp>
       <p:sp>
         <p:nvSpPr>
-          <p:cNvPr id="18" name="Text 15"/>
-          <p:cNvSpPr/>
-          <p:nvPr/>
-        </p:nvSpPr>
-        <p:spPr>
-          <a:xfrm>
-            <a:off x="566928" y="3438144"/>
-            <a:ext cx="274320" cy="274320"/>
-          </a:xfrm>
-          <a:prstGeom prst="rect">
-            <a:avLst/>
-          </a:prstGeom>
-          <a:noFill/>
-          <a:ln/>
-        </p:spPr>
-        <p:txBody>
-          <a:bodyPr wrap="square" lIns="0" tIns="0" rIns="0" bIns="0" rtlCol="0" anchor="ctr"/>
-          <a:lstStyle/>
-          <a:p>
-            <a:pPr algn="ctr" indent="0" marL="0">
-              <a:buNone/>
-            </a:pPr>
-            <a:r>
-              <a:rPr lang="en-US" sz="1100" b="1" dirty="0">
-                <a:solidFill>
-                  <a:srgbClr val="C9A227"/>
-                </a:solidFill>
-                <a:latin typeface="Calibri" pitchFamily="34" charset="0"/>
-                <a:ea typeface="Calibri" pitchFamily="34" charset="-122"/>
-                <a:cs typeface="Calibri" pitchFamily="34" charset="-120"/>
-              </a:rPr>
-              <a:t>✓</a:t>
-            </a:r>
-            <a:endParaRPr lang="en-US" sz="1100" dirty="0"/>
-          </a:p>
-        </p:txBody>
-      </p:sp>
-      <p:sp>
-        <p:nvSpPr>
-          <p:cNvPr id="19" name="Text 16"/>
+          <p:cNvPr id="15" name="Text 12"/>
           <p:cNvSpPr/>
           <p:nvPr/>
         </p:nvSpPr>
@@ -10837,7 +10213,7 @@
       </p:sp>
       <p:sp>
         <p:nvSpPr>
-          <p:cNvPr id="20" name="Text 17"/>
+          <p:cNvPr id="16" name="Text 13"/>
           <p:cNvSpPr/>
           <p:nvPr/>
         </p:nvSpPr>
@@ -10876,20 +10252,20 @@
       </p:sp>
       <p:sp>
         <p:nvSpPr>
-          <p:cNvPr id="21" name="Shape 18"/>
-          <p:cNvSpPr/>
-          <p:nvPr/>
-        </p:nvSpPr>
-        <p:spPr>
-          <a:xfrm>
-            <a:off x="566928" y="4059936"/>
-            <a:ext cx="274320" cy="274320"/>
+          <p:cNvPr id="17" name="Shape 14"/>
+          <p:cNvSpPr/>
+          <p:nvPr/>
+        </p:nvSpPr>
+        <p:spPr>
+          <a:xfrm>
+            <a:off x="603504" y="4123944"/>
+            <a:ext cx="146304" cy="146304"/>
           </a:xfrm>
           <a:prstGeom prst="ellipse">
             <a:avLst/>
           </a:prstGeom>
           <a:solidFill>
-            <a:srgbClr val="23242A"/>
+            <a:srgbClr val="C9A227"/>
           </a:solidFill>
           <a:ln w="12700">
             <a:solidFill>
@@ -10901,46 +10277,7 @@
       </p:sp>
       <p:sp>
         <p:nvSpPr>
-          <p:cNvPr id="22" name="Text 19"/>
-          <p:cNvSpPr/>
-          <p:nvPr/>
-        </p:nvSpPr>
-        <p:spPr>
-          <a:xfrm>
-            <a:off x="566928" y="4059936"/>
-            <a:ext cx="274320" cy="274320"/>
-          </a:xfrm>
-          <a:prstGeom prst="rect">
-            <a:avLst/>
-          </a:prstGeom>
-          <a:noFill/>
-          <a:ln/>
-        </p:spPr>
-        <p:txBody>
-          <a:bodyPr wrap="square" lIns="0" tIns="0" rIns="0" bIns="0" rtlCol="0" anchor="ctr"/>
-          <a:lstStyle/>
-          <a:p>
-            <a:pPr algn="ctr" indent="0" marL="0">
-              <a:buNone/>
-            </a:pPr>
-            <a:r>
-              <a:rPr lang="en-US" sz="1100" b="1" dirty="0">
-                <a:solidFill>
-                  <a:srgbClr val="C9A227"/>
-                </a:solidFill>
-                <a:latin typeface="Calibri" pitchFamily="34" charset="0"/>
-                <a:ea typeface="Calibri" pitchFamily="34" charset="-122"/>
-                <a:cs typeface="Calibri" pitchFamily="34" charset="-120"/>
-              </a:rPr>
-              <a:t>✓</a:t>
-            </a:r>
-            <a:endParaRPr lang="en-US" sz="1100" dirty="0"/>
-          </a:p>
-        </p:txBody>
-      </p:sp>
-      <p:sp>
-        <p:nvSpPr>
-          <p:cNvPr id="23" name="Text 20"/>
+          <p:cNvPr id="18" name="Text 15"/>
           <p:cNvSpPr/>
           <p:nvPr/>
         </p:nvSpPr>
@@ -10979,7 +10316,7 @@
       </p:sp>
       <p:sp>
         <p:nvSpPr>
-          <p:cNvPr id="24" name="Text 21"/>
+          <p:cNvPr id="19" name="Text 16"/>
           <p:cNvSpPr/>
           <p:nvPr/>
         </p:nvSpPr>
@@ -11010,7 +10347,7 @@
                 <a:ea typeface="Calibri" pitchFamily="34" charset="-122"/>
                 <a:cs typeface="Calibri" pitchFamily="34" charset="-120"/>
               </a:rPr>
-              <a:t>Built and demonstrable today in the CDE sample — who, what, before/after, when.</a:t>
+              <a:t>Built and demonstrable today in the CDE sample: who, what, before and after, when.</a:t>
             </a:r>
             <a:endParaRPr lang="en-US" sz="1150" dirty="0"/>
           </a:p>
@@ -11018,20 +10355,20 @@
       </p:sp>
       <p:sp>
         <p:nvSpPr>
-          <p:cNvPr id="25" name="Shape 22"/>
-          <p:cNvSpPr/>
-          <p:nvPr/>
-        </p:nvSpPr>
-        <p:spPr>
-          <a:xfrm>
-            <a:off x="566928" y="4681728"/>
-            <a:ext cx="274320" cy="274320"/>
+          <p:cNvPr id="20" name="Shape 17"/>
+          <p:cNvSpPr/>
+          <p:nvPr/>
+        </p:nvSpPr>
+        <p:spPr>
+          <a:xfrm>
+            <a:off x="603504" y="4745736"/>
+            <a:ext cx="146304" cy="146304"/>
           </a:xfrm>
           <a:prstGeom prst="ellipse">
             <a:avLst/>
           </a:prstGeom>
           <a:solidFill>
-            <a:srgbClr val="23242A"/>
+            <a:srgbClr val="C9A227"/>
           </a:solidFill>
           <a:ln w="12700">
             <a:solidFill>
@@ -11043,46 +10380,7 @@
       </p:sp>
       <p:sp>
         <p:nvSpPr>
-          <p:cNvPr id="26" name="Text 23"/>
-          <p:cNvSpPr/>
-          <p:nvPr/>
-        </p:nvSpPr>
-        <p:spPr>
-          <a:xfrm>
-            <a:off x="566928" y="4681728"/>
-            <a:ext cx="274320" cy="274320"/>
-          </a:xfrm>
-          <a:prstGeom prst="rect">
-            <a:avLst/>
-          </a:prstGeom>
-          <a:noFill/>
-          <a:ln/>
-        </p:spPr>
-        <p:txBody>
-          <a:bodyPr wrap="square" lIns="0" tIns="0" rIns="0" bIns="0" rtlCol="0" anchor="ctr"/>
-          <a:lstStyle/>
-          <a:p>
-            <a:pPr algn="ctr" indent="0" marL="0">
-              <a:buNone/>
-            </a:pPr>
-            <a:r>
-              <a:rPr lang="en-US" sz="1100" b="1" dirty="0">
-                <a:solidFill>
-                  <a:srgbClr val="C9A227"/>
-                </a:solidFill>
-                <a:latin typeface="Calibri" pitchFamily="34" charset="0"/>
-                <a:ea typeface="Calibri" pitchFamily="34" charset="-122"/>
-                <a:cs typeface="Calibri" pitchFamily="34" charset="-120"/>
-              </a:rPr>
-              <a:t>✓</a:t>
-            </a:r>
-            <a:endParaRPr lang="en-US" sz="1100" dirty="0"/>
-          </a:p>
-        </p:txBody>
-      </p:sp>
-      <p:sp>
-        <p:nvSpPr>
-          <p:cNvPr id="27" name="Text 24"/>
+          <p:cNvPr id="21" name="Text 18"/>
           <p:cNvSpPr/>
           <p:nvPr/>
         </p:nvSpPr>
@@ -11121,7 +10419,7 @@
       </p:sp>
       <p:sp>
         <p:nvSpPr>
-          <p:cNvPr id="28" name="Text 25"/>
+          <p:cNvPr id="22" name="Text 19"/>
           <p:cNvSpPr/>
           <p:nvPr/>
         </p:nvSpPr>
@@ -11152,7 +10450,7 @@
                 <a:ea typeface="Calibri" pitchFamily="34" charset="-122"/>
                 <a:cs typeface="Calibri" pitchFamily="34" charset="-120"/>
               </a:rPr>
-              <a:t>OpenAPI spec published; every mutating route role-gated server-side.</a:t>
+              <a:t>OpenAPI spec published. Every mutating route is role-gated server-side.</a:t>
             </a:r>
             <a:endParaRPr lang="en-US" sz="1150" dirty="0"/>
           </a:p>
@@ -11160,7 +10458,7 @@
       </p:sp>
       <p:sp>
         <p:nvSpPr>
-          <p:cNvPr id="29" name="Shape 26"/>
+          <p:cNvPr id="23" name="Shape 20"/>
           <p:cNvSpPr/>
           <p:nvPr/>
         </p:nvSpPr>
@@ -11187,7 +10485,7 @@
       </p:sp>
       <p:sp>
         <p:nvSpPr>
-          <p:cNvPr id="30" name="Text 27"/>
+          <p:cNvPr id="24" name="Text 21"/>
           <p:cNvSpPr/>
           <p:nvPr/>
         </p:nvSpPr>
@@ -11218,7 +10516,7 @@
                 <a:ea typeface="Calibri" pitchFamily="34" charset="-122"/>
                 <a:cs typeface="Calibri" pitchFamily="34" charset="-120"/>
               </a:rPr>
-              <a:t>These are commitments for the delivered production system. The pre-award demo you have seen implements the audit trail and role model today; the identity, transport and hosting controls arrive with the Azure deployment.</a:t>
+              <a:t>These are commitments for the delivered production system. The pre-award demo you have seen implements the audit trail and role model today. The identity, transport and hosting controls arrive with the Azure deployment.</a:t>
             </a:r>
             <a:endParaRPr lang="en-US" sz="1150" dirty="0"/>
           </a:p>
@@ -11226,7 +10524,7 @@
       </p:sp>
       <p:sp>
         <p:nvSpPr>
-          <p:cNvPr id="31" name="Text 28"/>
+          <p:cNvPr id="25" name="Text 22"/>
           <p:cNvSpPr/>
           <p:nvPr/>
         </p:nvSpPr>
@@ -11257,7 +10555,7 @@
                 <a:ea typeface="Calibri" pitchFamily="34" charset="-122"/>
                 <a:cs typeface="Calibri" pitchFamily="34" charset="-120"/>
               </a:rPr>
-              <a:t>XD House · Ma'aden ARGP Security &amp; Assurance · 15 July 2026</a:t>
+              <a:t>XD House   |   Ma'aden ARGP Security &amp; Assurance   |   15 July 2026</a:t>
             </a:r>
             <a:endParaRPr lang="en-US" sz="900" dirty="0"/>
           </a:p>
@@ -11481,7 +10779,7 @@
                 <a:ea typeface="Calibri" pitchFamily="34" charset="-122"/>
                 <a:cs typeface="Calibri" pitchFamily="34" charset="-120"/>
               </a:rPr>
-              <a:t>BSI Kitemark™ — BIM Design and Construction, and BIM Security</a:t>
+              <a:t>BSI Kitemark for BIM Design and Construction, and for BIM Security</a:t>
             </a:r>
             <a:endParaRPr lang="en-US" sz="1350" dirty="0"/>
           </a:p>
@@ -11523,7 +10821,7 @@
                 <a:ea typeface="Calibri" pitchFamily="34" charset="-122"/>
                 <a:cs typeface="Calibri" pitchFamily="34" charset="-120"/>
               </a:rPr>
-              <a:t>BIM Security addresses security-minded information management for built assets — directly relevant to a Common Data Environment.</a:t>
+              <a:t>BIM Security addresses security-minded information management for built assets, which is directly relevant to a Common Data Environment.</a:t>
             </a:r>
             <a:endParaRPr lang="en-US" sz="1100" dirty="0"/>
           </a:p>
@@ -11660,7 +10958,7 @@
                 <a:ea typeface="Calibri" pitchFamily="34" charset="-122"/>
                 <a:cs typeface="Calibri" pitchFamily="34" charset="-120"/>
               </a:rPr>
-              <a:t>A certification claim is the first thing a security reviewer verifies. An unsupportable one ends the review — and the relationship.</a:t>
+              <a:t>A certification claim is the first thing a security reviewer verifies. An unsupportable one ends the review, and the relationship.</a:t>
             </a:r>
             <a:endParaRPr lang="en-US" sz="1350" dirty="0"/>
           </a:p>
@@ -11728,7 +11026,7 @@
                 <a:ea typeface="Calibri" pitchFamily="34" charset="-122"/>
                 <a:cs typeface="Calibri" pitchFamily="34" charset="-120"/>
               </a:rPr>
-              <a:t>Certificate numbers and scope available on request · XD House · 15 July 2026</a:t>
+              <a:t>Certificate numbers and scope available on request.</a:t>
             </a:r>
             <a:endParaRPr lang="en-US" sz="900" dirty="0"/>
           </a:p>
@@ -11838,7 +11136,7 @@
                 <a:ea typeface="Calibri" pitchFamily="34" charset="-122"/>
                 <a:cs typeface="Calibri" pitchFamily="34" charset="-120"/>
               </a:rPr>
-              <a:t>Five documents — available to your reviewers today</a:t>
+              <a:t>Five documents, available to your reviewers today</a:t>
             </a:r>
             <a:endParaRPr lang="en-US" sz="1300" dirty="0"/>
           </a:p>
@@ -12177,7 +11475,7 @@
                 <a:ea typeface="Calibri" pitchFamily="34" charset="-122"/>
                 <a:cs typeface="Calibri" pitchFamily="34" charset="-120"/>
               </a:rPr>
-              <a:t>Production Readiness Audit — 13 Layers</a:t>
+              <a:t>Production Readiness Audit, 13 Layers</a:t>
             </a:r>
             <a:endParaRPr lang="en-US" sz="1350" dirty="0"/>
           </a:p>
@@ -12387,7 +11685,7 @@
                 <a:ea typeface="Calibri" pitchFamily="34" charset="-122"/>
                 <a:cs typeface="Calibri" pitchFamily="34" charset="-120"/>
               </a:rPr>
-              <a:t>Penetration Test — Scope &amp; Commission Plan</a:t>
+              <a:t>Penetration Test, Scope &amp; Commission Plan</a:t>
             </a:r>
             <a:endParaRPr lang="en-US" sz="1350" dirty="0"/>
           </a:p>
@@ -12426,7 +11724,7 @@
                 <a:ea typeface="Calibri" pitchFamily="34" charset="-122"/>
                 <a:cs typeface="Calibri" pitchFamily="34" charset="-120"/>
               </a:rPr>
-              <a:t>What will be tested, by whom, and when — a plan, not a result</a:t>
+              <a:t>What will be tested, by whom, and when. A plan, not a result.</a:t>
             </a:r>
             <a:endParaRPr lang="en-US" sz="1100" dirty="0"/>
           </a:p>
@@ -12807,7 +12105,7 @@
                 <a:ea typeface="Calibri" pitchFamily="34" charset="-122"/>
                 <a:cs typeface="Calibri" pitchFamily="34" charset="-120"/>
               </a:rPr>
-              <a:t>Security Questionnaire — Pre-Answers</a:t>
+              <a:t>Security Questionnaire, Pre-Answers</a:t>
             </a:r>
             <a:endParaRPr lang="en-US" sz="1350" dirty="0"/>
           </a:p>
@@ -12846,7 +12144,7 @@
                 <a:ea typeface="Calibri" pitchFamily="34" charset="-122"/>
                 <a:cs typeface="Calibri" pitchFamily="34" charset="-120"/>
               </a:rPr>
-              <a:t>Demo-today vs production-committed, answered side by side</a:t>
+              <a:t>Demo-today against production-committed, answered side by side</a:t>
             </a:r>
             <a:endParaRPr lang="en-US" sz="1100" dirty="0"/>
           </a:p>
@@ -12990,7 +12288,7 @@
                 <a:ea typeface="Calibri" pitchFamily="34" charset="-122"/>
                 <a:cs typeface="Calibri" pitchFamily="34" charset="-120"/>
               </a:rPr>
-              <a:t>XD House · Ma'aden ARGP Security &amp; Assurance · 15 July 2026</a:t>
+              <a:t>XD House   |   Ma'aden ARGP Security &amp; Assurance   |   15 July 2026</a:t>
             </a:r>
             <a:endParaRPr lang="en-US" sz="900" dirty="0"/>
           </a:p>

--- a/RFQ Doc/2026.07.15 Security Pack/Maaden ARGP - Security & Assurance.pptx
+++ b/RFQ Doc/2026.07.15 Security Pack/Maaden ARGP - Security & Assurance.pptx
@@ -2053,8 +2053,8 @@
         </p:nvSpPr>
         <p:spPr>
           <a:xfrm>
-            <a:off x="685800" y="2825496"/>
-            <a:ext cx="146304" cy="146304"/>
+            <a:off x="658368" y="2752344"/>
+            <a:ext cx="310896" cy="310896"/>
           </a:xfrm>
           <a:prstGeom prst="ellipse">
             <a:avLst/>
@@ -2078,6 +2078,45 @@
         </p:nvSpPr>
         <p:spPr>
           <a:xfrm>
+            <a:off x="658368" y="2752344"/>
+            <a:ext cx="310896" cy="310896"/>
+          </a:xfrm>
+          <a:prstGeom prst="rect">
+            <a:avLst/>
+          </a:prstGeom>
+          <a:noFill/>
+          <a:ln/>
+        </p:spPr>
+        <p:txBody>
+          <a:bodyPr wrap="square" lIns="0" tIns="0" rIns="0" bIns="0" rtlCol="0" anchor="ctr"/>
+          <a:lstStyle/>
+          <a:p>
+            <a:pPr algn="ctr" indent="0" marL="0">
+              <a:buNone/>
+            </a:pPr>
+            <a:r>
+              <a:rPr lang="en-US" sz="1224" b="1" dirty="0">
+                <a:solidFill>
+                  <a:srgbClr val="23242A"/>
+                </a:solidFill>
+                <a:latin typeface="Calibri" pitchFamily="34" charset="0"/>
+                <a:ea typeface="Calibri" pitchFamily="34" charset="-122"/>
+                <a:cs typeface="Calibri" pitchFamily="34" charset="-120"/>
+              </a:rPr>
+              <a:t>✓</a:t>
+            </a:r>
+            <a:endParaRPr lang="en-US" sz="1224" dirty="0"/>
+          </a:p>
+        </p:txBody>
+      </p:sp>
+      <p:sp>
+        <p:nvSpPr>
+          <p:cNvPr id="6" name="Text 3"/>
+          <p:cNvSpPr/>
+          <p:nvPr/>
+        </p:nvSpPr>
+        <p:spPr>
+          <a:xfrm>
             <a:off x="1115568" y="2697480"/>
             <a:ext cx="3017520" cy="384048"/>
           </a:xfrm>
@@ -2111,7 +2150,7 @@
       </p:sp>
       <p:sp>
         <p:nvSpPr>
-          <p:cNvPr id="6" name="Text 3"/>
+          <p:cNvPr id="7" name="Text 4"/>
           <p:cNvSpPr/>
           <p:nvPr/>
         </p:nvSpPr>
@@ -2150,14 +2189,14 @@
       </p:sp>
       <p:sp>
         <p:nvSpPr>
-          <p:cNvPr id="7" name="Shape 4"/>
-          <p:cNvSpPr/>
-          <p:nvPr/>
-        </p:nvSpPr>
-        <p:spPr>
-          <a:xfrm>
-            <a:off x="685800" y="3538728"/>
-            <a:ext cx="146304" cy="146304"/>
+          <p:cNvPr id="8" name="Shape 5"/>
+          <p:cNvSpPr/>
+          <p:nvPr/>
+        </p:nvSpPr>
+        <p:spPr>
+          <a:xfrm>
+            <a:off x="658368" y="3465576"/>
+            <a:ext cx="310896" cy="310896"/>
           </a:xfrm>
           <a:prstGeom prst="ellipse">
             <a:avLst/>
@@ -2175,7 +2214,46 @@
       </p:sp>
       <p:sp>
         <p:nvSpPr>
-          <p:cNvPr id="8" name="Text 5"/>
+          <p:cNvPr id="9" name="Text 6"/>
+          <p:cNvSpPr/>
+          <p:nvPr/>
+        </p:nvSpPr>
+        <p:spPr>
+          <a:xfrm>
+            <a:off x="658368" y="3465576"/>
+            <a:ext cx="310896" cy="310896"/>
+          </a:xfrm>
+          <a:prstGeom prst="rect">
+            <a:avLst/>
+          </a:prstGeom>
+          <a:noFill/>
+          <a:ln/>
+        </p:spPr>
+        <p:txBody>
+          <a:bodyPr wrap="square" lIns="0" tIns="0" rIns="0" bIns="0" rtlCol="0" anchor="ctr"/>
+          <a:lstStyle/>
+          <a:p>
+            <a:pPr algn="ctr" indent="0" marL="0">
+              <a:buNone/>
+            </a:pPr>
+            <a:r>
+              <a:rPr lang="en-US" sz="1224" b="1" dirty="0">
+                <a:solidFill>
+                  <a:srgbClr val="23242A"/>
+                </a:solidFill>
+                <a:latin typeface="Calibri" pitchFamily="34" charset="0"/>
+                <a:ea typeface="Calibri" pitchFamily="34" charset="-122"/>
+                <a:cs typeface="Calibri" pitchFamily="34" charset="-120"/>
+              </a:rPr>
+              <a:t>✓</a:t>
+            </a:r>
+            <a:endParaRPr lang="en-US" sz="1224" dirty="0"/>
+          </a:p>
+        </p:txBody>
+      </p:sp>
+      <p:sp>
+        <p:nvSpPr>
+          <p:cNvPr id="10" name="Text 7"/>
           <p:cNvSpPr/>
           <p:nvPr/>
         </p:nvSpPr>
@@ -2214,7 +2292,7 @@
       </p:sp>
       <p:sp>
         <p:nvSpPr>
-          <p:cNvPr id="9" name="Text 6"/>
+          <p:cNvPr id="11" name="Text 8"/>
           <p:cNvSpPr/>
           <p:nvPr/>
         </p:nvSpPr>
@@ -2253,14 +2331,14 @@
       </p:sp>
       <p:sp>
         <p:nvSpPr>
-          <p:cNvPr id="10" name="Shape 7"/>
-          <p:cNvSpPr/>
-          <p:nvPr/>
-        </p:nvSpPr>
-        <p:spPr>
-          <a:xfrm>
-            <a:off x="685800" y="4251960"/>
-            <a:ext cx="146304" cy="146304"/>
+          <p:cNvPr id="12" name="Shape 9"/>
+          <p:cNvSpPr/>
+          <p:nvPr/>
+        </p:nvSpPr>
+        <p:spPr>
+          <a:xfrm>
+            <a:off x="658368" y="4178808"/>
+            <a:ext cx="310896" cy="310896"/>
           </a:xfrm>
           <a:prstGeom prst="ellipse">
             <a:avLst/>
@@ -2278,7 +2356,46 @@
       </p:sp>
       <p:sp>
         <p:nvSpPr>
-          <p:cNvPr id="11" name="Text 8"/>
+          <p:cNvPr id="13" name="Text 10"/>
+          <p:cNvSpPr/>
+          <p:nvPr/>
+        </p:nvSpPr>
+        <p:spPr>
+          <a:xfrm>
+            <a:off x="658368" y="4178808"/>
+            <a:ext cx="310896" cy="310896"/>
+          </a:xfrm>
+          <a:prstGeom prst="rect">
+            <a:avLst/>
+          </a:prstGeom>
+          <a:noFill/>
+          <a:ln/>
+        </p:spPr>
+        <p:txBody>
+          <a:bodyPr wrap="square" lIns="0" tIns="0" rIns="0" bIns="0" rtlCol="0" anchor="ctr"/>
+          <a:lstStyle/>
+          <a:p>
+            <a:pPr algn="ctr" indent="0" marL="0">
+              <a:buNone/>
+            </a:pPr>
+            <a:r>
+              <a:rPr lang="en-US" sz="1224" b="1" dirty="0">
+                <a:solidFill>
+                  <a:srgbClr val="23242A"/>
+                </a:solidFill>
+                <a:latin typeface="Calibri" pitchFamily="34" charset="0"/>
+                <a:ea typeface="Calibri" pitchFamily="34" charset="-122"/>
+                <a:cs typeface="Calibri" pitchFamily="34" charset="-120"/>
+              </a:rPr>
+              <a:t>✓</a:t>
+            </a:r>
+            <a:endParaRPr lang="en-US" sz="1224" dirty="0"/>
+          </a:p>
+        </p:txBody>
+      </p:sp>
+      <p:sp>
+        <p:nvSpPr>
+          <p:cNvPr id="14" name="Text 11"/>
           <p:cNvSpPr/>
           <p:nvPr/>
         </p:nvSpPr>
@@ -2317,7 +2434,7 @@
       </p:sp>
       <p:sp>
         <p:nvSpPr>
-          <p:cNvPr id="12" name="Text 9"/>
+          <p:cNvPr id="15" name="Text 12"/>
           <p:cNvSpPr/>
           <p:nvPr/>
         </p:nvSpPr>
@@ -2356,7 +2473,7 @@
       </p:sp>
       <p:sp>
         <p:nvSpPr>
-          <p:cNvPr id="13" name="Text 10"/>
+          <p:cNvPr id="16" name="Text 13"/>
           <p:cNvSpPr/>
           <p:nvPr/>
         </p:nvSpPr>
@@ -2395,7 +2512,7 @@
       </p:sp>
       <p:sp>
         <p:nvSpPr>
-          <p:cNvPr id="14" name="Text 11"/>
+          <p:cNvPr id="17" name="Text 14"/>
           <p:cNvSpPr/>
           <p:nvPr/>
         </p:nvSpPr>
@@ -2434,7 +2551,7 @@
       </p:sp>
       <p:sp>
         <p:nvSpPr>
-          <p:cNvPr id="15" name="Shape 12"/>
+          <p:cNvPr id="18" name="Shape 15"/>
           <p:cNvSpPr/>
           <p:nvPr/>
         </p:nvSpPr>
@@ -2461,7 +2578,7 @@
       </p:sp>
       <p:pic>
         <p:nvPicPr>
-          <p:cNvPr id="16" name="Image 1" descr="preencoded.png">    </p:cNvPr>
+          <p:cNvPr id="19" name="Image 1" descr="preencoded.png">    </p:cNvPr>
           <p:cNvPicPr>
             <a:picLocks noChangeAspect="1"/>
           </p:cNvPicPr>
@@ -8902,18 +9019,18 @@
         </p:nvSpPr>
         <p:spPr>
           <a:xfrm>
-            <a:off x="822960" y="1828800"/>
-            <a:ext cx="146304" cy="146304"/>
+            <a:off x="777240" y="1764792"/>
+            <a:ext cx="384048" cy="384048"/>
           </a:xfrm>
           <a:prstGeom prst="ellipse">
             <a:avLst/>
           </a:prstGeom>
           <a:solidFill>
-            <a:srgbClr val="2E7D32"/>
+            <a:srgbClr val="E5F2E6"/>
           </a:solidFill>
           <a:ln w="12700">
             <a:solidFill>
-              <a:srgbClr val="2E7D32"/>
+              <a:srgbClr val="E5F2E6"/>
             </a:solidFill>
             <a:prstDash val="solid"/>
           </a:ln>
@@ -8927,8 +9044,47 @@
         </p:nvSpPr>
         <p:spPr>
           <a:xfrm>
-            <a:off x="1115568" y="1728216"/>
-            <a:ext cx="4663440" cy="274320"/>
+            <a:off x="777240" y="1764792"/>
+            <a:ext cx="384048" cy="384048"/>
+          </a:xfrm>
+          <a:prstGeom prst="rect">
+            <a:avLst/>
+          </a:prstGeom>
+          <a:noFill/>
+          <a:ln/>
+        </p:spPr>
+        <p:txBody>
+          <a:bodyPr wrap="square" lIns="0" tIns="0" rIns="0" bIns="0" rtlCol="0" anchor="ctr"/>
+          <a:lstStyle/>
+          <a:p>
+            <a:pPr algn="ctr" indent="0" marL="0">
+              <a:buNone/>
+            </a:pPr>
+            <a:r>
+              <a:rPr lang="en-US" sz="1512" b="1" dirty="0">
+                <a:solidFill>
+                  <a:srgbClr val="2E7D32"/>
+                </a:solidFill>
+                <a:latin typeface="Calibri" pitchFamily="34" charset="0"/>
+                <a:ea typeface="Calibri" pitchFamily="34" charset="-122"/>
+                <a:cs typeface="Calibri" pitchFamily="34" charset="-120"/>
+              </a:rPr>
+              <a:t>✓</a:t>
+            </a:r>
+            <a:endParaRPr lang="en-US" sz="1512" dirty="0"/>
+          </a:p>
+        </p:txBody>
+      </p:sp>
+      <p:sp>
+        <p:nvSpPr>
+          <p:cNvPr id="8" name="Text 5"/>
+          <p:cNvSpPr/>
+          <p:nvPr/>
+        </p:nvSpPr>
+        <p:spPr>
+          <a:xfrm>
+            <a:off x="1298448" y="1728216"/>
+            <a:ext cx="4480560" cy="274320"/>
           </a:xfrm>
           <a:prstGeom prst="rect">
             <a:avLst/>
@@ -8960,14 +9116,14 @@
       </p:sp>
       <p:sp>
         <p:nvSpPr>
-          <p:cNvPr id="8" name="Text 5"/>
-          <p:cNvSpPr/>
-          <p:nvPr/>
-        </p:nvSpPr>
-        <p:spPr>
-          <a:xfrm>
-            <a:off x="1115568" y="2029968"/>
-            <a:ext cx="4663440" cy="658368"/>
+          <p:cNvPr id="9" name="Text 6"/>
+          <p:cNvSpPr/>
+          <p:nvPr/>
+        </p:nvSpPr>
+        <p:spPr>
+          <a:xfrm>
+            <a:off x="1298448" y="2029968"/>
+            <a:ext cx="4480560" cy="658368"/>
           </a:xfrm>
           <a:prstGeom prst="rect">
             <a:avLst/>
@@ -9002,7 +9158,7 @@
       </p:sp>
       <p:sp>
         <p:nvSpPr>
-          <p:cNvPr id="9" name="Shape 6"/>
+          <p:cNvPr id="10" name="Shape 7"/>
           <p:cNvSpPr/>
           <p:nvPr/>
         </p:nvSpPr>
@@ -9029,24 +9185,24 @@
       </p:sp>
       <p:sp>
         <p:nvSpPr>
-          <p:cNvPr id="10" name="Shape 7"/>
-          <p:cNvSpPr/>
-          <p:nvPr/>
-        </p:nvSpPr>
-        <p:spPr>
-          <a:xfrm>
-            <a:off x="6492240" y="1828800"/>
-            <a:ext cx="146304" cy="146304"/>
+          <p:cNvPr id="11" name="Shape 8"/>
+          <p:cNvSpPr/>
+          <p:nvPr/>
+        </p:nvSpPr>
+        <p:spPr>
+          <a:xfrm>
+            <a:off x="6446520" y="1764792"/>
+            <a:ext cx="384048" cy="384048"/>
           </a:xfrm>
           <a:prstGeom prst="ellipse">
             <a:avLst/>
           </a:prstGeom>
           <a:solidFill>
-            <a:srgbClr val="2E7D32"/>
+            <a:srgbClr val="E5F2E6"/>
           </a:solidFill>
           <a:ln w="12700">
             <a:solidFill>
-              <a:srgbClr val="2E7D32"/>
+              <a:srgbClr val="E5F2E6"/>
             </a:solidFill>
             <a:prstDash val="solid"/>
           </a:ln>
@@ -9054,14 +9210,53 @@
       </p:sp>
       <p:sp>
         <p:nvSpPr>
-          <p:cNvPr id="11" name="Text 8"/>
-          <p:cNvSpPr/>
-          <p:nvPr/>
-        </p:nvSpPr>
-        <p:spPr>
-          <a:xfrm>
-            <a:off x="6784848" y="1728216"/>
-            <a:ext cx="4663440" cy="274320"/>
+          <p:cNvPr id="12" name="Text 9"/>
+          <p:cNvSpPr/>
+          <p:nvPr/>
+        </p:nvSpPr>
+        <p:spPr>
+          <a:xfrm>
+            <a:off x="6446520" y="1764792"/>
+            <a:ext cx="384048" cy="384048"/>
+          </a:xfrm>
+          <a:prstGeom prst="rect">
+            <a:avLst/>
+          </a:prstGeom>
+          <a:noFill/>
+          <a:ln/>
+        </p:spPr>
+        <p:txBody>
+          <a:bodyPr wrap="square" lIns="0" tIns="0" rIns="0" bIns="0" rtlCol="0" anchor="ctr"/>
+          <a:lstStyle/>
+          <a:p>
+            <a:pPr algn="ctr" indent="0" marL="0">
+              <a:buNone/>
+            </a:pPr>
+            <a:r>
+              <a:rPr lang="en-US" sz="1512" b="1" dirty="0">
+                <a:solidFill>
+                  <a:srgbClr val="2E7D32"/>
+                </a:solidFill>
+                <a:latin typeface="Calibri" pitchFamily="34" charset="0"/>
+                <a:ea typeface="Calibri" pitchFamily="34" charset="-122"/>
+                <a:cs typeface="Calibri" pitchFamily="34" charset="-120"/>
+              </a:rPr>
+              <a:t>✓</a:t>
+            </a:r>
+            <a:endParaRPr lang="en-US" sz="1512" dirty="0"/>
+          </a:p>
+        </p:txBody>
+      </p:sp>
+      <p:sp>
+        <p:nvSpPr>
+          <p:cNvPr id="13" name="Text 10"/>
+          <p:cNvSpPr/>
+          <p:nvPr/>
+        </p:nvSpPr>
+        <p:spPr>
+          <a:xfrm>
+            <a:off x="6967728" y="1728216"/>
+            <a:ext cx="4480560" cy="274320"/>
           </a:xfrm>
           <a:prstGeom prst="rect">
             <a:avLst/>
@@ -9093,14 +9288,14 @@
       </p:sp>
       <p:sp>
         <p:nvSpPr>
-          <p:cNvPr id="12" name="Text 9"/>
-          <p:cNvSpPr/>
-          <p:nvPr/>
-        </p:nvSpPr>
-        <p:spPr>
-          <a:xfrm>
-            <a:off x="6784848" y="2029968"/>
-            <a:ext cx="4663440" cy="658368"/>
+          <p:cNvPr id="14" name="Text 11"/>
+          <p:cNvSpPr/>
+          <p:nvPr/>
+        </p:nvSpPr>
+        <p:spPr>
+          <a:xfrm>
+            <a:off x="6967728" y="2029968"/>
+            <a:ext cx="4480560" cy="658368"/>
           </a:xfrm>
           <a:prstGeom prst="rect">
             <a:avLst/>
@@ -9135,7 +9330,7 @@
       </p:sp>
       <p:sp>
         <p:nvSpPr>
-          <p:cNvPr id="13" name="Shape 10"/>
+          <p:cNvPr id="15" name="Shape 12"/>
           <p:cNvSpPr/>
           <p:nvPr/>
         </p:nvSpPr>
@@ -9162,24 +9357,24 @@
       </p:sp>
       <p:sp>
         <p:nvSpPr>
-          <p:cNvPr id="14" name="Shape 11"/>
-          <p:cNvSpPr/>
-          <p:nvPr/>
-        </p:nvSpPr>
-        <p:spPr>
-          <a:xfrm>
-            <a:off x="822960" y="3310128"/>
-            <a:ext cx="146304" cy="146304"/>
+          <p:cNvPr id="16" name="Shape 13"/>
+          <p:cNvSpPr/>
+          <p:nvPr/>
+        </p:nvSpPr>
+        <p:spPr>
+          <a:xfrm>
+            <a:off x="777240" y="3246120"/>
+            <a:ext cx="384048" cy="384048"/>
           </a:xfrm>
           <a:prstGeom prst="ellipse">
             <a:avLst/>
           </a:prstGeom>
           <a:solidFill>
-            <a:srgbClr val="2E7D32"/>
+            <a:srgbClr val="E5F2E6"/>
           </a:solidFill>
           <a:ln w="12700">
             <a:solidFill>
-              <a:srgbClr val="2E7D32"/>
+              <a:srgbClr val="E5F2E6"/>
             </a:solidFill>
             <a:prstDash val="solid"/>
           </a:ln>
@@ -9187,14 +9382,53 @@
       </p:sp>
       <p:sp>
         <p:nvSpPr>
-          <p:cNvPr id="15" name="Text 12"/>
-          <p:cNvSpPr/>
-          <p:nvPr/>
-        </p:nvSpPr>
-        <p:spPr>
-          <a:xfrm>
-            <a:off x="1115568" y="3209544"/>
-            <a:ext cx="4663440" cy="274320"/>
+          <p:cNvPr id="17" name="Text 14"/>
+          <p:cNvSpPr/>
+          <p:nvPr/>
+        </p:nvSpPr>
+        <p:spPr>
+          <a:xfrm>
+            <a:off x="777240" y="3246120"/>
+            <a:ext cx="384048" cy="384048"/>
+          </a:xfrm>
+          <a:prstGeom prst="rect">
+            <a:avLst/>
+          </a:prstGeom>
+          <a:noFill/>
+          <a:ln/>
+        </p:spPr>
+        <p:txBody>
+          <a:bodyPr wrap="square" lIns="0" tIns="0" rIns="0" bIns="0" rtlCol="0" anchor="ctr"/>
+          <a:lstStyle/>
+          <a:p>
+            <a:pPr algn="ctr" indent="0" marL="0">
+              <a:buNone/>
+            </a:pPr>
+            <a:r>
+              <a:rPr lang="en-US" sz="1512" b="1" dirty="0">
+                <a:solidFill>
+                  <a:srgbClr val="2E7D32"/>
+                </a:solidFill>
+                <a:latin typeface="Calibri" pitchFamily="34" charset="0"/>
+                <a:ea typeface="Calibri" pitchFamily="34" charset="-122"/>
+                <a:cs typeface="Calibri" pitchFamily="34" charset="-120"/>
+              </a:rPr>
+              <a:t>✓</a:t>
+            </a:r>
+            <a:endParaRPr lang="en-US" sz="1512" dirty="0"/>
+          </a:p>
+        </p:txBody>
+      </p:sp>
+      <p:sp>
+        <p:nvSpPr>
+          <p:cNvPr id="18" name="Text 15"/>
+          <p:cNvSpPr/>
+          <p:nvPr/>
+        </p:nvSpPr>
+        <p:spPr>
+          <a:xfrm>
+            <a:off x="1298448" y="3209544"/>
+            <a:ext cx="4480560" cy="274320"/>
           </a:xfrm>
           <a:prstGeom prst="rect">
             <a:avLst/>
@@ -9226,14 +9460,14 @@
       </p:sp>
       <p:sp>
         <p:nvSpPr>
-          <p:cNvPr id="16" name="Text 13"/>
-          <p:cNvSpPr/>
-          <p:nvPr/>
-        </p:nvSpPr>
-        <p:spPr>
-          <a:xfrm>
-            <a:off x="1115568" y="3511296"/>
-            <a:ext cx="4663440" cy="658368"/>
+          <p:cNvPr id="19" name="Text 16"/>
+          <p:cNvSpPr/>
+          <p:nvPr/>
+        </p:nvSpPr>
+        <p:spPr>
+          <a:xfrm>
+            <a:off x="1298448" y="3511296"/>
+            <a:ext cx="4480560" cy="658368"/>
           </a:xfrm>
           <a:prstGeom prst="rect">
             <a:avLst/>
@@ -9268,7 +9502,7 @@
       </p:sp>
       <p:sp>
         <p:nvSpPr>
-          <p:cNvPr id="17" name="Shape 14"/>
+          <p:cNvPr id="20" name="Shape 17"/>
           <p:cNvSpPr/>
           <p:nvPr/>
         </p:nvSpPr>
@@ -9295,24 +9529,24 @@
       </p:sp>
       <p:sp>
         <p:nvSpPr>
-          <p:cNvPr id="18" name="Shape 15"/>
-          <p:cNvSpPr/>
-          <p:nvPr/>
-        </p:nvSpPr>
-        <p:spPr>
-          <a:xfrm>
-            <a:off x="6492240" y="3310128"/>
-            <a:ext cx="146304" cy="146304"/>
+          <p:cNvPr id="21" name="Shape 18"/>
+          <p:cNvSpPr/>
+          <p:nvPr/>
+        </p:nvSpPr>
+        <p:spPr>
+          <a:xfrm>
+            <a:off x="6446520" y="3246120"/>
+            <a:ext cx="384048" cy="384048"/>
           </a:xfrm>
           <a:prstGeom prst="ellipse">
             <a:avLst/>
           </a:prstGeom>
           <a:solidFill>
-            <a:srgbClr val="2E7D32"/>
+            <a:srgbClr val="E5F2E6"/>
           </a:solidFill>
           <a:ln w="12700">
             <a:solidFill>
-              <a:srgbClr val="2E7D32"/>
+              <a:srgbClr val="E5F2E6"/>
             </a:solidFill>
             <a:prstDash val="solid"/>
           </a:ln>
@@ -9320,14 +9554,53 @@
       </p:sp>
       <p:sp>
         <p:nvSpPr>
-          <p:cNvPr id="19" name="Text 16"/>
-          <p:cNvSpPr/>
-          <p:nvPr/>
-        </p:nvSpPr>
-        <p:spPr>
-          <a:xfrm>
-            <a:off x="6784848" y="3209544"/>
-            <a:ext cx="4663440" cy="274320"/>
+          <p:cNvPr id="22" name="Text 19"/>
+          <p:cNvSpPr/>
+          <p:nvPr/>
+        </p:nvSpPr>
+        <p:spPr>
+          <a:xfrm>
+            <a:off x="6446520" y="3246120"/>
+            <a:ext cx="384048" cy="384048"/>
+          </a:xfrm>
+          <a:prstGeom prst="rect">
+            <a:avLst/>
+          </a:prstGeom>
+          <a:noFill/>
+          <a:ln/>
+        </p:spPr>
+        <p:txBody>
+          <a:bodyPr wrap="square" lIns="0" tIns="0" rIns="0" bIns="0" rtlCol="0" anchor="ctr"/>
+          <a:lstStyle/>
+          <a:p>
+            <a:pPr algn="ctr" indent="0" marL="0">
+              <a:buNone/>
+            </a:pPr>
+            <a:r>
+              <a:rPr lang="en-US" sz="1512" b="1" dirty="0">
+                <a:solidFill>
+                  <a:srgbClr val="2E7D32"/>
+                </a:solidFill>
+                <a:latin typeface="Calibri" pitchFamily="34" charset="0"/>
+                <a:ea typeface="Calibri" pitchFamily="34" charset="-122"/>
+                <a:cs typeface="Calibri" pitchFamily="34" charset="-120"/>
+              </a:rPr>
+              <a:t>✓</a:t>
+            </a:r>
+            <a:endParaRPr lang="en-US" sz="1512" dirty="0"/>
+          </a:p>
+        </p:txBody>
+      </p:sp>
+      <p:sp>
+        <p:nvSpPr>
+          <p:cNvPr id="23" name="Text 20"/>
+          <p:cNvSpPr/>
+          <p:nvPr/>
+        </p:nvSpPr>
+        <p:spPr>
+          <a:xfrm>
+            <a:off x="6967728" y="3209544"/>
+            <a:ext cx="4480560" cy="274320"/>
           </a:xfrm>
           <a:prstGeom prst="rect">
             <a:avLst/>
@@ -9359,14 +9632,14 @@
       </p:sp>
       <p:sp>
         <p:nvSpPr>
-          <p:cNvPr id="20" name="Text 17"/>
-          <p:cNvSpPr/>
-          <p:nvPr/>
-        </p:nvSpPr>
-        <p:spPr>
-          <a:xfrm>
-            <a:off x="6784848" y="3511296"/>
-            <a:ext cx="4663440" cy="658368"/>
+          <p:cNvPr id="24" name="Text 21"/>
+          <p:cNvSpPr/>
+          <p:nvPr/>
+        </p:nvSpPr>
+        <p:spPr>
+          <a:xfrm>
+            <a:off x="6967728" y="3511296"/>
+            <a:ext cx="4480560" cy="658368"/>
           </a:xfrm>
           <a:prstGeom prst="rect">
             <a:avLst/>
@@ -9401,7 +9674,7 @@
       </p:sp>
       <p:sp>
         <p:nvSpPr>
-          <p:cNvPr id="21" name="Shape 18"/>
+          <p:cNvPr id="25" name="Shape 22"/>
           <p:cNvSpPr/>
           <p:nvPr/>
         </p:nvSpPr>
@@ -9428,24 +9701,24 @@
       </p:sp>
       <p:sp>
         <p:nvSpPr>
-          <p:cNvPr id="22" name="Shape 19"/>
-          <p:cNvSpPr/>
-          <p:nvPr/>
-        </p:nvSpPr>
-        <p:spPr>
-          <a:xfrm>
-            <a:off x="822960" y="4791456"/>
-            <a:ext cx="146304" cy="146304"/>
+          <p:cNvPr id="26" name="Shape 23"/>
+          <p:cNvSpPr/>
+          <p:nvPr/>
+        </p:nvSpPr>
+        <p:spPr>
+          <a:xfrm>
+            <a:off x="777240" y="4727448"/>
+            <a:ext cx="384048" cy="384048"/>
           </a:xfrm>
           <a:prstGeom prst="ellipse">
             <a:avLst/>
           </a:prstGeom>
           <a:solidFill>
-            <a:srgbClr val="2E7D32"/>
+            <a:srgbClr val="E5F2E6"/>
           </a:solidFill>
           <a:ln w="12700">
             <a:solidFill>
-              <a:srgbClr val="2E7D32"/>
+              <a:srgbClr val="E5F2E6"/>
             </a:solidFill>
             <a:prstDash val="solid"/>
           </a:ln>
@@ -9453,14 +9726,53 @@
       </p:sp>
       <p:sp>
         <p:nvSpPr>
-          <p:cNvPr id="23" name="Text 20"/>
-          <p:cNvSpPr/>
-          <p:nvPr/>
-        </p:nvSpPr>
-        <p:spPr>
-          <a:xfrm>
-            <a:off x="1115568" y="4690872"/>
-            <a:ext cx="4663440" cy="274320"/>
+          <p:cNvPr id="27" name="Text 24"/>
+          <p:cNvSpPr/>
+          <p:nvPr/>
+        </p:nvSpPr>
+        <p:spPr>
+          <a:xfrm>
+            <a:off x="777240" y="4727448"/>
+            <a:ext cx="384048" cy="384048"/>
+          </a:xfrm>
+          <a:prstGeom prst="rect">
+            <a:avLst/>
+          </a:prstGeom>
+          <a:noFill/>
+          <a:ln/>
+        </p:spPr>
+        <p:txBody>
+          <a:bodyPr wrap="square" lIns="0" tIns="0" rIns="0" bIns="0" rtlCol="0" anchor="ctr"/>
+          <a:lstStyle/>
+          <a:p>
+            <a:pPr algn="ctr" indent="0" marL="0">
+              <a:buNone/>
+            </a:pPr>
+            <a:r>
+              <a:rPr lang="en-US" sz="1512" b="1" dirty="0">
+                <a:solidFill>
+                  <a:srgbClr val="2E7D32"/>
+                </a:solidFill>
+                <a:latin typeface="Calibri" pitchFamily="34" charset="0"/>
+                <a:ea typeface="Calibri" pitchFamily="34" charset="-122"/>
+                <a:cs typeface="Calibri" pitchFamily="34" charset="-120"/>
+              </a:rPr>
+              <a:t>✓</a:t>
+            </a:r>
+            <a:endParaRPr lang="en-US" sz="1512" dirty="0"/>
+          </a:p>
+        </p:txBody>
+      </p:sp>
+      <p:sp>
+        <p:nvSpPr>
+          <p:cNvPr id="28" name="Text 25"/>
+          <p:cNvSpPr/>
+          <p:nvPr/>
+        </p:nvSpPr>
+        <p:spPr>
+          <a:xfrm>
+            <a:off x="1298448" y="4690872"/>
+            <a:ext cx="4480560" cy="274320"/>
           </a:xfrm>
           <a:prstGeom prst="rect">
             <a:avLst/>
@@ -9492,14 +9804,14 @@
       </p:sp>
       <p:sp>
         <p:nvSpPr>
-          <p:cNvPr id="24" name="Text 21"/>
-          <p:cNvSpPr/>
-          <p:nvPr/>
-        </p:nvSpPr>
-        <p:spPr>
-          <a:xfrm>
-            <a:off x="1115568" y="4992624"/>
-            <a:ext cx="4663440" cy="658368"/>
+          <p:cNvPr id="29" name="Text 26"/>
+          <p:cNvSpPr/>
+          <p:nvPr/>
+        </p:nvSpPr>
+        <p:spPr>
+          <a:xfrm>
+            <a:off x="1298448" y="4992624"/>
+            <a:ext cx="4480560" cy="658368"/>
           </a:xfrm>
           <a:prstGeom prst="rect">
             <a:avLst/>
@@ -9534,7 +9846,7 @@
       </p:sp>
       <p:sp>
         <p:nvSpPr>
-          <p:cNvPr id="25" name="Shape 22"/>
+          <p:cNvPr id="30" name="Shape 27"/>
           <p:cNvSpPr/>
           <p:nvPr/>
         </p:nvSpPr>
@@ -9561,24 +9873,24 @@
       </p:sp>
       <p:sp>
         <p:nvSpPr>
-          <p:cNvPr id="26" name="Shape 23"/>
-          <p:cNvSpPr/>
-          <p:nvPr/>
-        </p:nvSpPr>
-        <p:spPr>
-          <a:xfrm>
-            <a:off x="6492240" y="4791456"/>
-            <a:ext cx="146304" cy="146304"/>
+          <p:cNvPr id="31" name="Shape 28"/>
+          <p:cNvSpPr/>
+          <p:nvPr/>
+        </p:nvSpPr>
+        <p:spPr>
+          <a:xfrm>
+            <a:off x="6446520" y="4727448"/>
+            <a:ext cx="384048" cy="384048"/>
           </a:xfrm>
           <a:prstGeom prst="ellipse">
             <a:avLst/>
           </a:prstGeom>
           <a:solidFill>
-            <a:srgbClr val="2E7D32"/>
+            <a:srgbClr val="E5F2E6"/>
           </a:solidFill>
           <a:ln w="12700">
             <a:solidFill>
-              <a:srgbClr val="2E7D32"/>
+              <a:srgbClr val="E5F2E6"/>
             </a:solidFill>
             <a:prstDash val="solid"/>
           </a:ln>
@@ -9586,14 +9898,53 @@
       </p:sp>
       <p:sp>
         <p:nvSpPr>
-          <p:cNvPr id="27" name="Text 24"/>
-          <p:cNvSpPr/>
-          <p:nvPr/>
-        </p:nvSpPr>
-        <p:spPr>
-          <a:xfrm>
-            <a:off x="6784848" y="4690872"/>
-            <a:ext cx="4663440" cy="274320"/>
+          <p:cNvPr id="32" name="Text 29"/>
+          <p:cNvSpPr/>
+          <p:nvPr/>
+        </p:nvSpPr>
+        <p:spPr>
+          <a:xfrm>
+            <a:off x="6446520" y="4727448"/>
+            <a:ext cx="384048" cy="384048"/>
+          </a:xfrm>
+          <a:prstGeom prst="rect">
+            <a:avLst/>
+          </a:prstGeom>
+          <a:noFill/>
+          <a:ln/>
+        </p:spPr>
+        <p:txBody>
+          <a:bodyPr wrap="square" lIns="0" tIns="0" rIns="0" bIns="0" rtlCol="0" anchor="ctr"/>
+          <a:lstStyle/>
+          <a:p>
+            <a:pPr algn="ctr" indent="0" marL="0">
+              <a:buNone/>
+            </a:pPr>
+            <a:r>
+              <a:rPr lang="en-US" sz="1512" b="1" dirty="0">
+                <a:solidFill>
+                  <a:srgbClr val="2E7D32"/>
+                </a:solidFill>
+                <a:latin typeface="Calibri" pitchFamily="34" charset="0"/>
+                <a:ea typeface="Calibri" pitchFamily="34" charset="-122"/>
+                <a:cs typeface="Calibri" pitchFamily="34" charset="-120"/>
+              </a:rPr>
+              <a:t>✓</a:t>
+            </a:r>
+            <a:endParaRPr lang="en-US" sz="1512" dirty="0"/>
+          </a:p>
+        </p:txBody>
+      </p:sp>
+      <p:sp>
+        <p:nvSpPr>
+          <p:cNvPr id="33" name="Text 30"/>
+          <p:cNvSpPr/>
+          <p:nvPr/>
+        </p:nvSpPr>
+        <p:spPr>
+          <a:xfrm>
+            <a:off x="6967728" y="4690872"/>
+            <a:ext cx="4480560" cy="274320"/>
           </a:xfrm>
           <a:prstGeom prst="rect">
             <a:avLst/>
@@ -9625,14 +9976,14 @@
       </p:sp>
       <p:sp>
         <p:nvSpPr>
-          <p:cNvPr id="28" name="Text 25"/>
-          <p:cNvSpPr/>
-          <p:nvPr/>
-        </p:nvSpPr>
-        <p:spPr>
-          <a:xfrm>
-            <a:off x="6784848" y="4992624"/>
-            <a:ext cx="4663440" cy="658368"/>
+          <p:cNvPr id="34" name="Text 31"/>
+          <p:cNvSpPr/>
+          <p:nvPr/>
+        </p:nvSpPr>
+        <p:spPr>
+          <a:xfrm>
+            <a:off x="6967728" y="4992624"/>
+            <a:ext cx="4480560" cy="658368"/>
           </a:xfrm>
           <a:prstGeom prst="rect">
             <a:avLst/>
@@ -9667,7 +10018,7 @@
       </p:sp>
       <p:sp>
         <p:nvSpPr>
-          <p:cNvPr id="29" name="Text 26"/>
+          <p:cNvPr id="35" name="Text 32"/>
           <p:cNvSpPr/>
           <p:nvPr/>
         </p:nvSpPr>
@@ -9846,18 +10197,18 @@
         </p:nvSpPr>
         <p:spPr>
           <a:xfrm>
-            <a:off x="603504" y="1636776"/>
-            <a:ext cx="146304" cy="146304"/>
+            <a:off x="566928" y="1572768"/>
+            <a:ext cx="274320" cy="274320"/>
           </a:xfrm>
           <a:prstGeom prst="ellipse">
             <a:avLst/>
           </a:prstGeom>
           <a:solidFill>
-            <a:srgbClr val="C9A227"/>
+            <a:srgbClr val="23242A"/>
           </a:solidFill>
           <a:ln w="12700">
             <a:solidFill>
-              <a:srgbClr val="C9A227"/>
+              <a:srgbClr val="23242A"/>
             </a:solidFill>
             <a:prstDash val="solid"/>
           </a:ln>
@@ -9871,6 +10222,45 @@
         </p:nvSpPr>
         <p:spPr>
           <a:xfrm>
+            <a:off x="566928" y="1572768"/>
+            <a:ext cx="274320" cy="274320"/>
+          </a:xfrm>
+          <a:prstGeom prst="rect">
+            <a:avLst/>
+          </a:prstGeom>
+          <a:noFill/>
+          <a:ln/>
+        </p:spPr>
+        <p:txBody>
+          <a:bodyPr wrap="square" lIns="0" tIns="0" rIns="0" bIns="0" rtlCol="0" anchor="ctr"/>
+          <a:lstStyle/>
+          <a:p>
+            <a:pPr algn="ctr" indent="0" marL="0">
+              <a:buNone/>
+            </a:pPr>
+            <a:r>
+              <a:rPr lang="en-US" sz="1080" b="1" dirty="0">
+                <a:solidFill>
+                  <a:srgbClr val="C9A227"/>
+                </a:solidFill>
+                <a:latin typeface="Calibri" pitchFamily="34" charset="0"/>
+                <a:ea typeface="Calibri" pitchFamily="34" charset="-122"/>
+                <a:cs typeface="Calibri" pitchFamily="34" charset="-120"/>
+              </a:rPr>
+              <a:t>✓</a:t>
+            </a:r>
+            <a:endParaRPr lang="en-US" sz="1080" dirty="0"/>
+          </a:p>
+        </p:txBody>
+      </p:sp>
+      <p:sp>
+        <p:nvSpPr>
+          <p:cNvPr id="7" name="Text 4"/>
+          <p:cNvSpPr/>
+          <p:nvPr/>
+        </p:nvSpPr>
+        <p:spPr>
+          <a:xfrm>
             <a:off x="987552" y="1463040"/>
             <a:ext cx="4206240" cy="475488"/>
           </a:xfrm>
@@ -9904,7 +10294,7 @@
       </p:sp>
       <p:sp>
         <p:nvSpPr>
-          <p:cNvPr id="7" name="Text 4"/>
+          <p:cNvPr id="8" name="Text 5"/>
           <p:cNvSpPr/>
           <p:nvPr/>
         </p:nvSpPr>
@@ -9943,24 +10333,24 @@
       </p:sp>
       <p:sp>
         <p:nvSpPr>
-          <p:cNvPr id="8" name="Shape 5"/>
-          <p:cNvSpPr/>
-          <p:nvPr/>
-        </p:nvSpPr>
-        <p:spPr>
-          <a:xfrm>
-            <a:off x="603504" y="2258568"/>
-            <a:ext cx="146304" cy="146304"/>
+          <p:cNvPr id="9" name="Shape 6"/>
+          <p:cNvSpPr/>
+          <p:nvPr/>
+        </p:nvSpPr>
+        <p:spPr>
+          <a:xfrm>
+            <a:off x="566928" y="2194560"/>
+            <a:ext cx="274320" cy="274320"/>
           </a:xfrm>
           <a:prstGeom prst="ellipse">
             <a:avLst/>
           </a:prstGeom>
           <a:solidFill>
-            <a:srgbClr val="C9A227"/>
+            <a:srgbClr val="23242A"/>
           </a:solidFill>
           <a:ln w="12700">
             <a:solidFill>
-              <a:srgbClr val="C9A227"/>
+              <a:srgbClr val="23242A"/>
             </a:solidFill>
             <a:prstDash val="solid"/>
           </a:ln>
@@ -9968,7 +10358,46 @@
       </p:sp>
       <p:sp>
         <p:nvSpPr>
-          <p:cNvPr id="9" name="Text 6"/>
+          <p:cNvPr id="10" name="Text 7"/>
+          <p:cNvSpPr/>
+          <p:nvPr/>
+        </p:nvSpPr>
+        <p:spPr>
+          <a:xfrm>
+            <a:off x="566928" y="2194560"/>
+            <a:ext cx="274320" cy="274320"/>
+          </a:xfrm>
+          <a:prstGeom prst="rect">
+            <a:avLst/>
+          </a:prstGeom>
+          <a:noFill/>
+          <a:ln/>
+        </p:spPr>
+        <p:txBody>
+          <a:bodyPr wrap="square" lIns="0" tIns="0" rIns="0" bIns="0" rtlCol="0" anchor="ctr"/>
+          <a:lstStyle/>
+          <a:p>
+            <a:pPr algn="ctr" indent="0" marL="0">
+              <a:buNone/>
+            </a:pPr>
+            <a:r>
+              <a:rPr lang="en-US" sz="1080" b="1" dirty="0">
+                <a:solidFill>
+                  <a:srgbClr val="C9A227"/>
+                </a:solidFill>
+                <a:latin typeface="Calibri" pitchFamily="34" charset="0"/>
+                <a:ea typeface="Calibri" pitchFamily="34" charset="-122"/>
+                <a:cs typeface="Calibri" pitchFamily="34" charset="-120"/>
+              </a:rPr>
+              <a:t>✓</a:t>
+            </a:r>
+            <a:endParaRPr lang="en-US" sz="1080" dirty="0"/>
+          </a:p>
+        </p:txBody>
+      </p:sp>
+      <p:sp>
+        <p:nvSpPr>
+          <p:cNvPr id="11" name="Text 8"/>
           <p:cNvSpPr/>
           <p:nvPr/>
         </p:nvSpPr>
@@ -10007,7 +10436,7 @@
       </p:sp>
       <p:sp>
         <p:nvSpPr>
-          <p:cNvPr id="10" name="Text 7"/>
+          <p:cNvPr id="12" name="Text 9"/>
           <p:cNvSpPr/>
           <p:nvPr/>
         </p:nvSpPr>
@@ -10046,24 +10475,24 @@
       </p:sp>
       <p:sp>
         <p:nvSpPr>
-          <p:cNvPr id="11" name="Shape 8"/>
-          <p:cNvSpPr/>
-          <p:nvPr/>
-        </p:nvSpPr>
-        <p:spPr>
-          <a:xfrm>
-            <a:off x="603504" y="2880360"/>
-            <a:ext cx="146304" cy="146304"/>
+          <p:cNvPr id="13" name="Shape 10"/>
+          <p:cNvSpPr/>
+          <p:nvPr/>
+        </p:nvSpPr>
+        <p:spPr>
+          <a:xfrm>
+            <a:off x="566928" y="2816352"/>
+            <a:ext cx="274320" cy="274320"/>
           </a:xfrm>
           <a:prstGeom prst="ellipse">
             <a:avLst/>
           </a:prstGeom>
           <a:solidFill>
-            <a:srgbClr val="C9A227"/>
+            <a:srgbClr val="23242A"/>
           </a:solidFill>
           <a:ln w="12700">
             <a:solidFill>
-              <a:srgbClr val="C9A227"/>
+              <a:srgbClr val="23242A"/>
             </a:solidFill>
             <a:prstDash val="solid"/>
           </a:ln>
@@ -10071,7 +10500,46 @@
       </p:sp>
       <p:sp>
         <p:nvSpPr>
-          <p:cNvPr id="12" name="Text 9"/>
+          <p:cNvPr id="14" name="Text 11"/>
+          <p:cNvSpPr/>
+          <p:nvPr/>
+        </p:nvSpPr>
+        <p:spPr>
+          <a:xfrm>
+            <a:off x="566928" y="2816352"/>
+            <a:ext cx="274320" cy="274320"/>
+          </a:xfrm>
+          <a:prstGeom prst="rect">
+            <a:avLst/>
+          </a:prstGeom>
+          <a:noFill/>
+          <a:ln/>
+        </p:spPr>
+        <p:txBody>
+          <a:bodyPr wrap="square" lIns="0" tIns="0" rIns="0" bIns="0" rtlCol="0" anchor="ctr"/>
+          <a:lstStyle/>
+          <a:p>
+            <a:pPr algn="ctr" indent="0" marL="0">
+              <a:buNone/>
+            </a:pPr>
+            <a:r>
+              <a:rPr lang="en-US" sz="1080" b="1" dirty="0">
+                <a:solidFill>
+                  <a:srgbClr val="C9A227"/>
+                </a:solidFill>
+                <a:latin typeface="Calibri" pitchFamily="34" charset="0"/>
+                <a:ea typeface="Calibri" pitchFamily="34" charset="-122"/>
+                <a:cs typeface="Calibri" pitchFamily="34" charset="-120"/>
+              </a:rPr>
+              <a:t>✓</a:t>
+            </a:r>
+            <a:endParaRPr lang="en-US" sz="1080" dirty="0"/>
+          </a:p>
+        </p:txBody>
+      </p:sp>
+      <p:sp>
+        <p:nvSpPr>
+          <p:cNvPr id="15" name="Text 12"/>
           <p:cNvSpPr/>
           <p:nvPr/>
         </p:nvSpPr>
@@ -10110,7 +10578,7 @@
       </p:sp>
       <p:sp>
         <p:nvSpPr>
-          <p:cNvPr id="13" name="Text 10"/>
+          <p:cNvPr id="16" name="Text 13"/>
           <p:cNvSpPr/>
           <p:nvPr/>
         </p:nvSpPr>
@@ -10149,24 +10617,24 @@
       </p:sp>
       <p:sp>
         <p:nvSpPr>
-          <p:cNvPr id="14" name="Shape 11"/>
-          <p:cNvSpPr/>
-          <p:nvPr/>
-        </p:nvSpPr>
-        <p:spPr>
-          <a:xfrm>
-            <a:off x="603504" y="3502152"/>
-            <a:ext cx="146304" cy="146304"/>
+          <p:cNvPr id="17" name="Shape 14"/>
+          <p:cNvSpPr/>
+          <p:nvPr/>
+        </p:nvSpPr>
+        <p:spPr>
+          <a:xfrm>
+            <a:off x="566928" y="3438144"/>
+            <a:ext cx="274320" cy="274320"/>
           </a:xfrm>
           <a:prstGeom prst="ellipse">
             <a:avLst/>
           </a:prstGeom>
           <a:solidFill>
-            <a:srgbClr val="C9A227"/>
+            <a:srgbClr val="23242A"/>
           </a:solidFill>
           <a:ln w="12700">
             <a:solidFill>
-              <a:srgbClr val="C9A227"/>
+              <a:srgbClr val="23242A"/>
             </a:solidFill>
             <a:prstDash val="solid"/>
           </a:ln>
@@ -10174,7 +10642,46 @@
       </p:sp>
       <p:sp>
         <p:nvSpPr>
-          <p:cNvPr id="15" name="Text 12"/>
+          <p:cNvPr id="18" name="Text 15"/>
+          <p:cNvSpPr/>
+          <p:nvPr/>
+        </p:nvSpPr>
+        <p:spPr>
+          <a:xfrm>
+            <a:off x="566928" y="3438144"/>
+            <a:ext cx="274320" cy="274320"/>
+          </a:xfrm>
+          <a:prstGeom prst="rect">
+            <a:avLst/>
+          </a:prstGeom>
+          <a:noFill/>
+          <a:ln/>
+        </p:spPr>
+        <p:txBody>
+          <a:bodyPr wrap="square" lIns="0" tIns="0" rIns="0" bIns="0" rtlCol="0" anchor="ctr"/>
+          <a:lstStyle/>
+          <a:p>
+            <a:pPr algn="ctr" indent="0" marL="0">
+              <a:buNone/>
+            </a:pPr>
+            <a:r>
+              <a:rPr lang="en-US" sz="1080" b="1" dirty="0">
+                <a:solidFill>
+                  <a:srgbClr val="C9A227"/>
+                </a:solidFill>
+                <a:latin typeface="Calibri" pitchFamily="34" charset="0"/>
+                <a:ea typeface="Calibri" pitchFamily="34" charset="-122"/>
+                <a:cs typeface="Calibri" pitchFamily="34" charset="-120"/>
+              </a:rPr>
+              <a:t>✓</a:t>
+            </a:r>
+            <a:endParaRPr lang="en-US" sz="1080" dirty="0"/>
+          </a:p>
+        </p:txBody>
+      </p:sp>
+      <p:sp>
+        <p:nvSpPr>
+          <p:cNvPr id="19" name="Text 16"/>
           <p:cNvSpPr/>
           <p:nvPr/>
         </p:nvSpPr>
@@ -10213,7 +10720,7 @@
       </p:sp>
       <p:sp>
         <p:nvSpPr>
-          <p:cNvPr id="16" name="Text 13"/>
+          <p:cNvPr id="20" name="Text 17"/>
           <p:cNvSpPr/>
           <p:nvPr/>
         </p:nvSpPr>
@@ -10252,24 +10759,24 @@
       </p:sp>
       <p:sp>
         <p:nvSpPr>
-          <p:cNvPr id="17" name="Shape 14"/>
-          <p:cNvSpPr/>
-          <p:nvPr/>
-        </p:nvSpPr>
-        <p:spPr>
-          <a:xfrm>
-            <a:off x="603504" y="4123944"/>
-            <a:ext cx="146304" cy="146304"/>
+          <p:cNvPr id="21" name="Shape 18"/>
+          <p:cNvSpPr/>
+          <p:nvPr/>
+        </p:nvSpPr>
+        <p:spPr>
+          <a:xfrm>
+            <a:off x="566928" y="4059936"/>
+            <a:ext cx="274320" cy="274320"/>
           </a:xfrm>
           <a:prstGeom prst="ellipse">
             <a:avLst/>
           </a:prstGeom>
           <a:solidFill>
-            <a:srgbClr val="C9A227"/>
+            <a:srgbClr val="23242A"/>
           </a:solidFill>
           <a:ln w="12700">
             <a:solidFill>
-              <a:srgbClr val="C9A227"/>
+              <a:srgbClr val="23242A"/>
             </a:solidFill>
             <a:prstDash val="solid"/>
           </a:ln>
@@ -10277,7 +10784,46 @@
       </p:sp>
       <p:sp>
         <p:nvSpPr>
-          <p:cNvPr id="18" name="Text 15"/>
+          <p:cNvPr id="22" name="Text 19"/>
+          <p:cNvSpPr/>
+          <p:nvPr/>
+        </p:nvSpPr>
+        <p:spPr>
+          <a:xfrm>
+            <a:off x="566928" y="4059936"/>
+            <a:ext cx="274320" cy="274320"/>
+          </a:xfrm>
+          <a:prstGeom prst="rect">
+            <a:avLst/>
+          </a:prstGeom>
+          <a:noFill/>
+          <a:ln/>
+        </p:spPr>
+        <p:txBody>
+          <a:bodyPr wrap="square" lIns="0" tIns="0" rIns="0" bIns="0" rtlCol="0" anchor="ctr"/>
+          <a:lstStyle/>
+          <a:p>
+            <a:pPr algn="ctr" indent="0" marL="0">
+              <a:buNone/>
+            </a:pPr>
+            <a:r>
+              <a:rPr lang="en-US" sz="1080" b="1" dirty="0">
+                <a:solidFill>
+                  <a:srgbClr val="C9A227"/>
+                </a:solidFill>
+                <a:latin typeface="Calibri" pitchFamily="34" charset="0"/>
+                <a:ea typeface="Calibri" pitchFamily="34" charset="-122"/>
+                <a:cs typeface="Calibri" pitchFamily="34" charset="-120"/>
+              </a:rPr>
+              <a:t>✓</a:t>
+            </a:r>
+            <a:endParaRPr lang="en-US" sz="1080" dirty="0"/>
+          </a:p>
+        </p:txBody>
+      </p:sp>
+      <p:sp>
+        <p:nvSpPr>
+          <p:cNvPr id="23" name="Text 20"/>
           <p:cNvSpPr/>
           <p:nvPr/>
         </p:nvSpPr>
@@ -10316,7 +10862,7 @@
       </p:sp>
       <p:sp>
         <p:nvSpPr>
-          <p:cNvPr id="19" name="Text 16"/>
+          <p:cNvPr id="24" name="Text 21"/>
           <p:cNvSpPr/>
           <p:nvPr/>
         </p:nvSpPr>
@@ -10355,24 +10901,24 @@
       </p:sp>
       <p:sp>
         <p:nvSpPr>
-          <p:cNvPr id="20" name="Shape 17"/>
-          <p:cNvSpPr/>
-          <p:nvPr/>
-        </p:nvSpPr>
-        <p:spPr>
-          <a:xfrm>
-            <a:off x="603504" y="4745736"/>
-            <a:ext cx="146304" cy="146304"/>
+          <p:cNvPr id="25" name="Shape 22"/>
+          <p:cNvSpPr/>
+          <p:nvPr/>
+        </p:nvSpPr>
+        <p:spPr>
+          <a:xfrm>
+            <a:off x="566928" y="4681728"/>
+            <a:ext cx="274320" cy="274320"/>
           </a:xfrm>
           <a:prstGeom prst="ellipse">
             <a:avLst/>
           </a:prstGeom>
           <a:solidFill>
-            <a:srgbClr val="C9A227"/>
+            <a:srgbClr val="23242A"/>
           </a:solidFill>
           <a:ln w="12700">
             <a:solidFill>
-              <a:srgbClr val="C9A227"/>
+              <a:srgbClr val="23242A"/>
             </a:solidFill>
             <a:prstDash val="solid"/>
           </a:ln>
@@ -10380,7 +10926,46 @@
       </p:sp>
       <p:sp>
         <p:nvSpPr>
-          <p:cNvPr id="21" name="Text 18"/>
+          <p:cNvPr id="26" name="Text 23"/>
+          <p:cNvSpPr/>
+          <p:nvPr/>
+        </p:nvSpPr>
+        <p:spPr>
+          <a:xfrm>
+            <a:off x="566928" y="4681728"/>
+            <a:ext cx="274320" cy="274320"/>
+          </a:xfrm>
+          <a:prstGeom prst="rect">
+            <a:avLst/>
+          </a:prstGeom>
+          <a:noFill/>
+          <a:ln/>
+        </p:spPr>
+        <p:txBody>
+          <a:bodyPr wrap="square" lIns="0" tIns="0" rIns="0" bIns="0" rtlCol="0" anchor="ctr"/>
+          <a:lstStyle/>
+          <a:p>
+            <a:pPr algn="ctr" indent="0" marL="0">
+              <a:buNone/>
+            </a:pPr>
+            <a:r>
+              <a:rPr lang="en-US" sz="1080" b="1" dirty="0">
+                <a:solidFill>
+                  <a:srgbClr val="C9A227"/>
+                </a:solidFill>
+                <a:latin typeface="Calibri" pitchFamily="34" charset="0"/>
+                <a:ea typeface="Calibri" pitchFamily="34" charset="-122"/>
+                <a:cs typeface="Calibri" pitchFamily="34" charset="-120"/>
+              </a:rPr>
+              <a:t>✓</a:t>
+            </a:r>
+            <a:endParaRPr lang="en-US" sz="1080" dirty="0"/>
+          </a:p>
+        </p:txBody>
+      </p:sp>
+      <p:sp>
+        <p:nvSpPr>
+          <p:cNvPr id="27" name="Text 24"/>
           <p:cNvSpPr/>
           <p:nvPr/>
         </p:nvSpPr>
@@ -10419,7 +11004,7 @@
       </p:sp>
       <p:sp>
         <p:nvSpPr>
-          <p:cNvPr id="22" name="Text 19"/>
+          <p:cNvPr id="28" name="Text 25"/>
           <p:cNvSpPr/>
           <p:nvPr/>
         </p:nvSpPr>
@@ -10458,7 +11043,7 @@
       </p:sp>
       <p:sp>
         <p:nvSpPr>
-          <p:cNvPr id="23" name="Shape 20"/>
+          <p:cNvPr id="29" name="Shape 26"/>
           <p:cNvSpPr/>
           <p:nvPr/>
         </p:nvSpPr>
@@ -10485,7 +11070,7 @@
       </p:sp>
       <p:sp>
         <p:nvSpPr>
-          <p:cNvPr id="24" name="Text 21"/>
+          <p:cNvPr id="30" name="Text 27"/>
           <p:cNvSpPr/>
           <p:nvPr/>
         </p:nvSpPr>
@@ -10524,7 +11109,7 @@
       </p:sp>
       <p:sp>
         <p:nvSpPr>
-          <p:cNvPr id="25" name="Text 22"/>
+          <p:cNvPr id="31" name="Text 28"/>
           <p:cNvSpPr/>
           <p:nvPr/>
         </p:nvSpPr>
